--- a/exports/pptx/lessons/senior-module-05-dot-addition/day-05-base-n.pptx
+++ b/exports/pptx/lessons/senior-module-05-dot-addition/day-05-base-n.pptx
@@ -16,9 +16,13 @@
     <p:sldId id="264" r:id="rId10"/>
     <p:sldId id="265" r:id="rId11"/>
     <p:sldId id="266" r:id="rId12"/>
+    <p:sldId id="267" r:id="rId13"/>
+    <p:sldId id="268" r:id="rId14"/>
+    <p:sldId id="269" r:id="rId15"/>
+    <p:sldId id="270" r:id="rId16"/>
   </p:sldIdLst>
   <p:notesMasterIdLst>
-    <p:notesMasterId r:id="rId13"/>
+    <p:notesMasterId r:id="rId17"/>
   </p:notesMasterIdLst>
   <p:sldSz cx="9144000" cy="5143500"/>
   <p:notesSz cx="5143500" cy="9144000"/>
@@ -712,6 +716,358 @@
             <a:fld id="{F7021451-1387-4CA6-816F-3879F97B5CBC}" type="slidenum">
               <a:rPr lang="en-US"/>
               <a:t>11</a:t>
+            </a:fld>
+            <a:endParaRPr lang="en-US"/>
+          </a:p>
+        </p:txBody>
+      </p:sp>
+    </p:spTree>
+    <p:extLst>
+      <p:ext uri="{BB962C8B-B14F-4D97-AF65-F5344CB8AC3E}">
+        <p14:creationId xmlns:p14="http://schemas.microsoft.com/office/powerpoint/2010/main" val="1024086991"/>
+      </p:ext>
+    </p:extLst>
+  </p:cSld>
+  <p:clrMapOvr>
+    <a:masterClrMapping/>
+  </p:clrMapOvr>
+</p:notes>
+</file>
+
+<file path=ppt/notesSlides/notesSlide12.xml><?xml version="1.0" encoding="utf-8"?>
+<p:notes xmlns:a="http://schemas.openxmlformats.org/drawingml/2006/main" xmlns:r="http://schemas.openxmlformats.org/officeDocument/2006/relationships" xmlns:p="http://schemas.openxmlformats.org/presentationml/2006/main">
+  <p:cSld>
+    <p:spTree>
+      <p:nvGrpSpPr>
+        <p:cNvPr id="1" name=""/>
+        <p:cNvGrpSpPr/>
+        <p:nvPr/>
+      </p:nvGrpSpPr>
+      <p:grpSpPr>
+        <a:xfrm>
+          <a:off x="0" y="0"/>
+          <a:ext cx="0" cy="0"/>
+          <a:chOff x="0" y="0"/>
+          <a:chExt cx="0" cy="0"/>
+        </a:xfrm>
+      </p:grpSpPr>
+      <p:sp>
+        <p:nvSpPr>
+          <p:cNvPr id="2" name="Slide Image Placeholder 1"/>
+          <p:cNvSpPr>
+            <a:spLocks noGrp="1" noRot="1" noChangeAspect="1"/>
+          </p:cNvSpPr>
+          <p:nvPr>
+            <p:ph type="sldImg"/>
+          </p:nvPr>
+        </p:nvSpPr>
+        <p:spPr/>
+      </p:sp>
+      <p:sp>
+        <p:nvSpPr>
+          <p:cNvPr id="3" name="Notes Placeholder 2"/>
+          <p:cNvSpPr>
+            <a:spLocks noGrp="1"/>
+          </p:cNvSpPr>
+          <p:nvPr>
+            <p:ph type="body" idx="1"/>
+          </p:nvPr>
+        </p:nvSpPr>
+        <p:spPr/>
+        <p:txBody>
+          <a:bodyPr/>
+          <a:lstStyle/>
+          <a:p>
+            <a:r>
+              <a:rPr lang="en-US" dirty="0"/>
+              <a:t/>
+            </a:r>
+            <a:endParaRPr lang="en-US" dirty="0"/>
+          </a:p>
+        </p:txBody>
+      </p:sp>
+      <p:sp>
+        <p:nvSpPr>
+          <p:cNvPr id="4" name="Slide Number Placeholder 3"/>
+          <p:cNvSpPr>
+            <a:spLocks noGrp="1"/>
+          </p:cNvSpPr>
+          <p:nvPr>
+            <p:ph type="sldNum" sz="quarter" idx="10"/>
+          </p:nvPr>
+        </p:nvSpPr>
+        <p:spPr/>
+        <p:txBody>
+          <a:bodyPr/>
+          <a:lstStyle/>
+          <a:p>
+            <a:fld id="{F7021451-1387-4CA6-816F-3879F97B5CBC}" type="slidenum">
+              <a:rPr lang="en-US"/>
+              <a:t>12</a:t>
+            </a:fld>
+            <a:endParaRPr lang="en-US"/>
+          </a:p>
+        </p:txBody>
+      </p:sp>
+    </p:spTree>
+    <p:extLst>
+      <p:ext uri="{BB962C8B-B14F-4D97-AF65-F5344CB8AC3E}">
+        <p14:creationId xmlns:p14="http://schemas.microsoft.com/office/powerpoint/2010/main" val="1024086991"/>
+      </p:ext>
+    </p:extLst>
+  </p:cSld>
+  <p:clrMapOvr>
+    <a:masterClrMapping/>
+  </p:clrMapOvr>
+</p:notes>
+</file>
+
+<file path=ppt/notesSlides/notesSlide13.xml><?xml version="1.0" encoding="utf-8"?>
+<p:notes xmlns:a="http://schemas.openxmlformats.org/drawingml/2006/main" xmlns:r="http://schemas.openxmlformats.org/officeDocument/2006/relationships" xmlns:p="http://schemas.openxmlformats.org/presentationml/2006/main">
+  <p:cSld>
+    <p:spTree>
+      <p:nvGrpSpPr>
+        <p:cNvPr id="1" name=""/>
+        <p:cNvGrpSpPr/>
+        <p:nvPr/>
+      </p:nvGrpSpPr>
+      <p:grpSpPr>
+        <a:xfrm>
+          <a:off x="0" y="0"/>
+          <a:ext cx="0" cy="0"/>
+          <a:chOff x="0" y="0"/>
+          <a:chExt cx="0" cy="0"/>
+        </a:xfrm>
+      </p:grpSpPr>
+      <p:sp>
+        <p:nvSpPr>
+          <p:cNvPr id="2" name="Slide Image Placeholder 1"/>
+          <p:cNvSpPr>
+            <a:spLocks noGrp="1" noRot="1" noChangeAspect="1"/>
+          </p:cNvSpPr>
+          <p:nvPr>
+            <p:ph type="sldImg"/>
+          </p:nvPr>
+        </p:nvSpPr>
+        <p:spPr/>
+      </p:sp>
+      <p:sp>
+        <p:nvSpPr>
+          <p:cNvPr id="3" name="Notes Placeholder 2"/>
+          <p:cNvSpPr>
+            <a:spLocks noGrp="1"/>
+          </p:cNvSpPr>
+          <p:nvPr>
+            <p:ph type="body" idx="1"/>
+          </p:nvPr>
+        </p:nvSpPr>
+        <p:spPr/>
+        <p:txBody>
+          <a:bodyPr/>
+          <a:lstStyle/>
+          <a:p>
+            <a:r>
+              <a:rPr lang="en-US" dirty="0"/>
+              <a:t/>
+            </a:r>
+            <a:endParaRPr lang="en-US" dirty="0"/>
+          </a:p>
+        </p:txBody>
+      </p:sp>
+      <p:sp>
+        <p:nvSpPr>
+          <p:cNvPr id="4" name="Slide Number Placeholder 3"/>
+          <p:cNvSpPr>
+            <a:spLocks noGrp="1"/>
+          </p:cNvSpPr>
+          <p:nvPr>
+            <p:ph type="sldNum" sz="quarter" idx="10"/>
+          </p:nvPr>
+        </p:nvSpPr>
+        <p:spPr/>
+        <p:txBody>
+          <a:bodyPr/>
+          <a:lstStyle/>
+          <a:p>
+            <a:fld id="{F7021451-1387-4CA6-816F-3879F97B5CBC}" type="slidenum">
+              <a:rPr lang="en-US"/>
+              <a:t>13</a:t>
+            </a:fld>
+            <a:endParaRPr lang="en-US"/>
+          </a:p>
+        </p:txBody>
+      </p:sp>
+    </p:spTree>
+    <p:extLst>
+      <p:ext uri="{BB962C8B-B14F-4D97-AF65-F5344CB8AC3E}">
+        <p14:creationId xmlns:p14="http://schemas.microsoft.com/office/powerpoint/2010/main" val="1024086991"/>
+      </p:ext>
+    </p:extLst>
+  </p:cSld>
+  <p:clrMapOvr>
+    <a:masterClrMapping/>
+  </p:clrMapOvr>
+</p:notes>
+</file>
+
+<file path=ppt/notesSlides/notesSlide14.xml><?xml version="1.0" encoding="utf-8"?>
+<p:notes xmlns:a="http://schemas.openxmlformats.org/drawingml/2006/main" xmlns:r="http://schemas.openxmlformats.org/officeDocument/2006/relationships" xmlns:p="http://schemas.openxmlformats.org/presentationml/2006/main">
+  <p:cSld>
+    <p:spTree>
+      <p:nvGrpSpPr>
+        <p:cNvPr id="1" name=""/>
+        <p:cNvGrpSpPr/>
+        <p:nvPr/>
+      </p:nvGrpSpPr>
+      <p:grpSpPr>
+        <a:xfrm>
+          <a:off x="0" y="0"/>
+          <a:ext cx="0" cy="0"/>
+          <a:chOff x="0" y="0"/>
+          <a:chExt cx="0" cy="0"/>
+        </a:xfrm>
+      </p:grpSpPr>
+      <p:sp>
+        <p:nvSpPr>
+          <p:cNvPr id="2" name="Slide Image Placeholder 1"/>
+          <p:cNvSpPr>
+            <a:spLocks noGrp="1" noRot="1" noChangeAspect="1"/>
+          </p:cNvSpPr>
+          <p:nvPr>
+            <p:ph type="sldImg"/>
+          </p:nvPr>
+        </p:nvSpPr>
+        <p:spPr/>
+      </p:sp>
+      <p:sp>
+        <p:nvSpPr>
+          <p:cNvPr id="3" name="Notes Placeholder 2"/>
+          <p:cNvSpPr>
+            <a:spLocks noGrp="1"/>
+          </p:cNvSpPr>
+          <p:nvPr>
+            <p:ph type="body" idx="1"/>
+          </p:nvPr>
+        </p:nvSpPr>
+        <p:spPr/>
+        <p:txBody>
+          <a:bodyPr/>
+          <a:lstStyle/>
+          <a:p>
+            <a:r>
+              <a:rPr lang="en-US" dirty="0"/>
+              <a:t/>
+            </a:r>
+            <a:endParaRPr lang="en-US" dirty="0"/>
+          </a:p>
+        </p:txBody>
+      </p:sp>
+      <p:sp>
+        <p:nvSpPr>
+          <p:cNvPr id="4" name="Slide Number Placeholder 3"/>
+          <p:cNvSpPr>
+            <a:spLocks noGrp="1"/>
+          </p:cNvSpPr>
+          <p:nvPr>
+            <p:ph type="sldNum" sz="quarter" idx="10"/>
+          </p:nvPr>
+        </p:nvSpPr>
+        <p:spPr/>
+        <p:txBody>
+          <a:bodyPr/>
+          <a:lstStyle/>
+          <a:p>
+            <a:fld id="{F7021451-1387-4CA6-816F-3879F97B5CBC}" type="slidenum">
+              <a:rPr lang="en-US"/>
+              <a:t>14</a:t>
+            </a:fld>
+            <a:endParaRPr lang="en-US"/>
+          </a:p>
+        </p:txBody>
+      </p:sp>
+    </p:spTree>
+    <p:extLst>
+      <p:ext uri="{BB962C8B-B14F-4D97-AF65-F5344CB8AC3E}">
+        <p14:creationId xmlns:p14="http://schemas.microsoft.com/office/powerpoint/2010/main" val="1024086991"/>
+      </p:ext>
+    </p:extLst>
+  </p:cSld>
+  <p:clrMapOvr>
+    <a:masterClrMapping/>
+  </p:clrMapOvr>
+</p:notes>
+</file>
+
+<file path=ppt/notesSlides/notesSlide15.xml><?xml version="1.0" encoding="utf-8"?>
+<p:notes xmlns:a="http://schemas.openxmlformats.org/drawingml/2006/main" xmlns:r="http://schemas.openxmlformats.org/officeDocument/2006/relationships" xmlns:p="http://schemas.openxmlformats.org/presentationml/2006/main">
+  <p:cSld>
+    <p:spTree>
+      <p:nvGrpSpPr>
+        <p:cNvPr id="1" name=""/>
+        <p:cNvGrpSpPr/>
+        <p:nvPr/>
+      </p:nvGrpSpPr>
+      <p:grpSpPr>
+        <a:xfrm>
+          <a:off x="0" y="0"/>
+          <a:ext cx="0" cy="0"/>
+          <a:chOff x="0" y="0"/>
+          <a:chExt cx="0" cy="0"/>
+        </a:xfrm>
+      </p:grpSpPr>
+      <p:sp>
+        <p:nvSpPr>
+          <p:cNvPr id="2" name="Slide Image Placeholder 1"/>
+          <p:cNvSpPr>
+            <a:spLocks noGrp="1" noRot="1" noChangeAspect="1"/>
+          </p:cNvSpPr>
+          <p:nvPr>
+            <p:ph type="sldImg"/>
+          </p:nvPr>
+        </p:nvSpPr>
+        <p:spPr/>
+      </p:sp>
+      <p:sp>
+        <p:nvSpPr>
+          <p:cNvPr id="3" name="Notes Placeholder 2"/>
+          <p:cNvSpPr>
+            <a:spLocks noGrp="1"/>
+          </p:cNvSpPr>
+          <p:nvPr>
+            <p:ph type="body" idx="1"/>
+          </p:nvPr>
+        </p:nvSpPr>
+        <p:spPr/>
+        <p:txBody>
+          <a:bodyPr/>
+          <a:lstStyle/>
+          <a:p>
+            <a:r>
+              <a:rPr lang="en-US" dirty="0"/>
+              <a:t/>
+            </a:r>
+            <a:endParaRPr lang="en-US" dirty="0"/>
+          </a:p>
+        </p:txBody>
+      </p:sp>
+      <p:sp>
+        <p:nvSpPr>
+          <p:cNvPr id="4" name="Slide Number Placeholder 3"/>
+          <p:cNvSpPr>
+            <a:spLocks noGrp="1"/>
+          </p:cNvSpPr>
+          <p:nvPr>
+            <p:ph type="sldNum" sz="quarter" idx="10"/>
+          </p:nvPr>
+        </p:nvSpPr>
+        <p:spPr/>
+        <p:txBody>
+          <a:bodyPr/>
+          <a:lstStyle/>
+          <a:p>
+            <a:fld id="{F7021451-1387-4CA6-816F-3879F97B5CBC}" type="slidenum">
+              <a:rPr lang="en-US"/>
+              <a:t>15</a:t>
             </a:fld>
             <a:endParaRPr lang="en-US"/>
           </a:p>
@@ -1965,102 +2321,6 @@
         </p:nvSpPr>
         <p:spPr>
           <a:xfrm>
-            <a:off x="406301" y="1223963"/>
-            <a:ext cx="8498026" cy="274290"/>
-          </a:xfrm>
-          <a:prstGeom prst="rect">
-            <a:avLst/>
-          </a:prstGeom>
-          <a:noFill/>
-          <a:ln/>
-        </p:spPr>
-        <p:txBody>
-          <a:bodyPr wrap="square" lIns="0" tIns="0" rIns="0" bIns="0" rtlCol="0" anchor="t"/>
-          <a:lstStyle/>
-          <a:p>
-            <a:pPr algn="l" indent="0" marL="0">
-              <a:lnSpc>
-                <a:spcPts val="2160"/>
-              </a:lnSpc>
-              <a:spcBef>
-                <a:spcPts val="600"/>
-              </a:spcBef>
-              <a:spcAft>
-                <a:spcPts val="800"/>
-              </a:spcAft>
-              <a:buNone/>
-            </a:pPr>
-            <a:r>
-              <a:rPr lang="en-US" sz="1800" b="1" dirty="0">
-                <a:solidFill>
-                  <a:srgbClr val="997929"/>
-                </a:solidFill>
-                <a:latin typeface="Times New Roman" pitchFamily="34" charset="0"/>
-                <a:ea typeface="Times New Roman" pitchFamily="34" charset="-122"/>
-                <a:cs typeface="Times New Roman" pitchFamily="34" charset="-120"/>
-              </a:rPr>
-              <a:t>Learning objective</a:t>
-            </a:r>
-            <a:endParaRPr lang="en-US" sz="1800" dirty="0"/>
-          </a:p>
-        </p:txBody>
-      </p:sp>
-      <p:sp>
-        <p:nvSpPr>
-          <p:cNvPr id="6" name="Text 4"/>
-          <p:cNvSpPr/>
-          <p:nvPr/>
-        </p:nvSpPr>
-        <p:spPr>
-          <a:xfrm>
-            <a:off x="406301" y="1637854"/>
-            <a:ext cx="8498026" cy="426541"/>
-          </a:xfrm>
-          <a:prstGeom prst="rect">
-            <a:avLst/>
-          </a:prstGeom>
-          <a:noFill/>
-          <a:ln/>
-        </p:spPr>
-        <p:txBody>
-          <a:bodyPr wrap="square" lIns="0" tIns="0" rIns="0" bIns="0" rtlCol="0" anchor="t"/>
-          <a:lstStyle/>
-          <a:p>
-            <a:pPr algn="l" indent="0" marL="0">
-              <a:lnSpc>
-                <a:spcPts val="1680"/>
-              </a:lnSpc>
-              <a:spcBef>
-                <a:spcPts val="300"/>
-              </a:spcBef>
-              <a:spcAft>
-                <a:spcPts val="300"/>
-              </a:spcAft>
-              <a:buNone/>
-            </a:pPr>
-            <a:r>
-              <a:rPr lang="en-US" sz="1200" dirty="0">
-                <a:solidFill>
-                  <a:srgbClr val="1A1A1A"/>
-                </a:solidFill>
-                <a:latin typeface="Georgia" pitchFamily="34" charset="0"/>
-                <a:ea typeface="Georgia" pitchFamily="34" charset="-122"/>
-                <a:cs typeface="Georgia" pitchFamily="34" charset="-120"/>
-              </a:rPr>
-              <a:t>Students extend the dot method to base 8 and base 16, identify what changes and what stays the same, and complete the formative quiz.</a:t>
-            </a:r>
-            <a:endParaRPr lang="en-US" sz="1200" dirty="0"/>
-          </a:p>
-        </p:txBody>
-      </p:sp>
-      <p:sp>
-        <p:nvSpPr>
-          <p:cNvPr id="7" name="Text 5"/>
-          <p:cNvSpPr/>
-          <p:nvPr/>
-        </p:nvSpPr>
-        <p:spPr>
-          <a:xfrm>
             <a:off x="406301" y="4434929"/>
             <a:ext cx="8498026" cy="213271"/>
           </a:xfrm>
@@ -2205,7 +2465,7 @@
                 <a:ea typeface="Times New Roman" pitchFamily="34" charset="-122"/>
                 <a:cs typeface="Times New Roman" pitchFamily="34" charset="-120"/>
               </a:rPr>
-              <a:t>Teacher notes</a:t>
+              <a:t>Practice (10 min)</a:t>
             </a:r>
             <a:endParaRPr lang="en-US" sz="1800" dirty="0"/>
           </a:p>
@@ -2220,7 +2480,7 @@
         <p:spPr>
           <a:xfrm>
             <a:off x="406301" y="870942"/>
-            <a:ext cx="8498026" cy="426541"/>
+            <a:ext cx="8498026" cy="213271"/>
           </a:xfrm>
           <a:prstGeom prst="rect">
             <a:avLst/>
@@ -2253,22 +2513,45 @@
                 <a:ea typeface="Georgia" pitchFamily="34" charset="-122"/>
                 <a:cs typeface="Georgia" pitchFamily="34" charset="-120"/>
               </a:rPr>
-              <a:t>– The base-</a:t>
-            </a:r>
-            <a:pPr algn="l" indent="0" marL="0">
-              <a:lnSpc>
-                <a:spcPts val="1680"/>
-              </a:lnSpc>
-              <a:spcBef>
-                <a:spcPts val="300"/>
-              </a:spcBef>
-              <a:spcAft>
-                <a:spcPts val="300"/>
-              </a:spcAft>
-              <a:buNone/>
-            </a:pPr>
-            <a:r>
-              <a:rPr lang="en-US" sz="1200" i="1" dirty="0">
+              <a:t>3 problems:</a:t>
+            </a:r>
+            <a:endParaRPr lang="en-US" sz="1200" dirty="0"/>
+          </a:p>
+        </p:txBody>
+      </p:sp>
+      <p:sp>
+        <p:nvSpPr>
+          <p:cNvPr id="5" name="Text 3"/>
+          <p:cNvSpPr/>
+          <p:nvPr/>
+        </p:nvSpPr>
+        <p:spPr>
+          <a:xfrm>
+            <a:off x="634901" y="1173063"/>
+            <a:ext cx="8102798" cy="769441"/>
+          </a:xfrm>
+          <a:prstGeom prst="rect">
+            <a:avLst/>
+          </a:prstGeom>
+          <a:noFill/>
+          <a:ln/>
+        </p:spPr>
+        <p:txBody>
+          <a:bodyPr wrap="square" lIns="0" tIns="0" rIns="0" bIns="0" rtlCol="0" anchor="t"/>
+          <a:lstStyle/>
+          <a:p>
+            <a:pPr algn="l" marL="342900" indent="-342900">
+              <a:lnSpc>
+                <a:spcPts val="1620"/>
+              </a:lnSpc>
+              <a:spcAft>
+                <a:spcPts val="300"/>
+              </a:spcAft>
+              <a:buSzPct val="100000"/>
+              <a:buChar char="•"/>
+            </a:pPr>
+            <a:r>
+              <a:rPr lang="en-US" sz="1200" dirty="0">
                 <a:solidFill>
                   <a:srgbClr val="1A1A1A"/>
                 </a:solidFill>
@@ -2276,19 +2559,20 @@
                 <a:ea typeface="Georgia" pitchFamily="34" charset="-122"/>
                 <a:cs typeface="Georgia" pitchFamily="34" charset="-120"/>
               </a:rPr>
-              <a:t>n</a:t>
-            </a:r>
-            <a:pPr algn="l" indent="0" marL="0">
-              <a:lnSpc>
-                <a:spcPts val="1680"/>
-              </a:lnSpc>
-              <a:spcBef>
-                <a:spcPts val="300"/>
-              </a:spcBef>
-              <a:spcAft>
-                <a:spcPts val="300"/>
-              </a:spcAft>
-              <a:buNone/>
+              <a:t>Base 8: column of 6 single-digit (in base 8: 0–7) numbers.</a:t>
+            </a:r>
+            <a:endParaRPr lang="en-US" sz="1200" dirty="0"/>
+          </a:p>
+          <a:p>
+            <a:pPr algn="l" marL="342900" indent="-342900">
+              <a:lnSpc>
+                <a:spcPts val="1620"/>
+              </a:lnSpc>
+              <a:spcAft>
+                <a:spcPts val="300"/>
+              </a:spcAft>
+              <a:buSzPct val="100000"/>
+              <a:buChar char="•"/>
             </a:pPr>
             <a:r>
               <a:rPr lang="en-US" sz="1200" dirty="0">
@@ -2299,15 +2583,39 @@
                 <a:ea typeface="Georgia" pitchFamily="34" charset="-122"/>
                 <a:cs typeface="Georgia" pitchFamily="34" charset="-120"/>
               </a:rPr>
-              <a:t> extension is a beautiful "of course it works" moment for math-track students. Lean into it. – For computer-science-track students, base 2 dot method = binary half-adder logic.</a:t>
+              <a:t>Base 16: column of 4 single-digit (0–F) numbers. (Hex.)</a:t>
             </a:r>
             <a:endParaRPr lang="en-US" sz="1200" dirty="0"/>
           </a:p>
-        </p:txBody>
-      </p:sp>
-      <p:sp>
-        <p:nvSpPr>
-          <p:cNvPr id="5" name="Text 3"/>
+          <a:p>
+            <a:pPr algn="l" marL="342900" indent="-342900">
+              <a:lnSpc>
+                <a:spcPts val="1620"/>
+              </a:lnSpc>
+              <a:spcAft>
+                <a:spcPts val="300"/>
+              </a:spcAft>
+              <a:buSzPct val="100000"/>
+              <a:buChar char="•"/>
+            </a:pPr>
+            <a:r>
+              <a:rPr lang="en-US" sz="1200" dirty="0">
+                <a:solidFill>
+                  <a:srgbClr val="1A1A1A"/>
+                </a:solidFill>
+                <a:latin typeface="Georgia" pitchFamily="34" charset="0"/>
+                <a:ea typeface="Georgia" pitchFamily="34" charset="-122"/>
+                <a:cs typeface="Georgia" pitchFamily="34" charset="-120"/>
+              </a:rPr>
+              <a:t>Base 10: a real 4×4 multi-column for comparison.</a:t>
+            </a:r>
+            <a:endParaRPr lang="en-US" sz="1200" dirty="0"/>
+          </a:p>
+        </p:txBody>
+      </p:sp>
+      <p:sp>
+        <p:nvSpPr>
+          <p:cNvPr id="6" name="Text 4"/>
           <p:cNvSpPr/>
           <p:nvPr/>
         </p:nvSpPr>
@@ -2457,6 +2765,1010 @@
                 <a:ea typeface="Times New Roman" pitchFamily="34" charset="-122"/>
                 <a:cs typeface="Times New Roman" pitchFamily="34" charset="-120"/>
               </a:rPr>
+              <a:t>Formative quiz Part B (8 min)</a:t>
+            </a:r>
+            <a:endParaRPr lang="en-US" sz="1800" dirty="0"/>
+          </a:p>
+        </p:txBody>
+      </p:sp>
+      <p:sp>
+        <p:nvSpPr>
+          <p:cNvPr id="4" name="Text 2"/>
+          <p:cNvSpPr/>
+          <p:nvPr/>
+        </p:nvSpPr>
+        <p:spPr>
+          <a:xfrm>
+            <a:off x="634901" y="883593"/>
+            <a:ext cx="8102798" cy="281880"/>
+          </a:xfrm>
+          <a:prstGeom prst="rect">
+            <a:avLst/>
+          </a:prstGeom>
+          <a:noFill/>
+          <a:ln/>
+        </p:spPr>
+        <p:txBody>
+          <a:bodyPr wrap="square" lIns="0" tIns="0" rIns="0" bIns="0" rtlCol="0" anchor="t"/>
+          <a:lstStyle/>
+          <a:p>
+            <a:pPr algn="l" marL="342900" indent="-342900">
+              <a:lnSpc>
+                <a:spcPts val="1620"/>
+              </a:lnSpc>
+              <a:spcAft>
+                <a:spcPts val="300"/>
+              </a:spcAft>
+              <a:buSzPct val="100000"/>
+              <a:buChar char="•"/>
+            </a:pPr>
+            <a:r>
+              <a:rPr lang="en-US" sz="1200" dirty="0">
+                <a:solidFill>
+                  <a:srgbClr val="1A1A1A"/>
+                </a:solidFill>
+                <a:latin typeface="Georgia" pitchFamily="34" charset="0"/>
+                <a:ea typeface="Georgia" pitchFamily="34" charset="-122"/>
+                <a:cs typeface="Georgia" pitchFamily="34" charset="-120"/>
+              </a:rPr>
+              <a:t>5 questions: mostly base-conversion and base-</a:t>
+            </a:r>
+            <a:pPr algn="l" indent="0" marL="0">
+              <a:lnSpc>
+                <a:spcPts val="1620"/>
+              </a:lnSpc>
+              <a:spcAft>
+                <a:spcPts val="300"/>
+              </a:spcAft>
+              <a:buNone/>
+            </a:pPr>
+            <a:r>
+              <a:rPr lang="en-US" sz="1200" i="1" dirty="0">
+                <a:solidFill>
+                  <a:srgbClr val="1A1A1A"/>
+                </a:solidFill>
+                <a:latin typeface="Georgia" pitchFamily="34" charset="0"/>
+                <a:ea typeface="Georgia" pitchFamily="34" charset="-122"/>
+                <a:cs typeface="Georgia" pitchFamily="34" charset="-120"/>
+              </a:rPr>
+              <a:t>n</a:t>
+            </a:r>
+            <a:pPr algn="l" indent="0" marL="0">
+              <a:lnSpc>
+                <a:spcPts val="1620"/>
+              </a:lnSpc>
+              <a:spcAft>
+                <a:spcPts val="300"/>
+              </a:spcAft>
+              <a:buNone/>
+            </a:pPr>
+            <a:r>
+              <a:rPr lang="en-US" sz="1200" dirty="0">
+                <a:solidFill>
+                  <a:srgbClr val="1A1A1A"/>
+                </a:solidFill>
+                <a:latin typeface="Georgia" pitchFamily="34" charset="0"/>
+                <a:ea typeface="Georgia" pitchFamily="34" charset="-122"/>
+                <a:cs typeface="Georgia" pitchFamily="34" charset="-120"/>
+              </a:rPr>
+              <a:t> dot method.</a:t>
+            </a:r>
+            <a:endParaRPr lang="en-US" sz="1200" dirty="0"/>
+          </a:p>
+        </p:txBody>
+      </p:sp>
+      <p:sp>
+        <p:nvSpPr>
+          <p:cNvPr id="5" name="Text 3"/>
+          <p:cNvSpPr/>
+          <p:nvPr/>
+        </p:nvSpPr>
+        <p:spPr>
+          <a:xfrm>
+            <a:off x="406301" y="4434929"/>
+            <a:ext cx="8498026" cy="213271"/>
+          </a:xfrm>
+          <a:prstGeom prst="rect">
+            <a:avLst/>
+          </a:prstGeom>
+          <a:noFill/>
+          <a:ln/>
+        </p:spPr>
+        <p:txBody>
+          <a:bodyPr wrap="square" lIns="0" tIns="0" rIns="0" bIns="0" rtlCol="0" anchor="t"/>
+          <a:lstStyle/>
+          <a:p>
+            <a:pPr algn="l" indent="0" marL="0">
+              <a:lnSpc>
+                <a:spcPts val="1680"/>
+              </a:lnSpc>
+              <a:spcBef>
+                <a:spcPts val="300"/>
+              </a:spcBef>
+              <a:spcAft>
+                <a:spcPts val="300"/>
+              </a:spcAft>
+              <a:buNone/>
+            </a:pPr>
+            <a:r>
+              <a:rPr lang="en-US" sz="1200" dirty="0">
+                <a:solidFill>
+                  <a:srgbClr val="1A1A1A"/>
+                </a:solidFill>
+                <a:latin typeface="Georgia" pitchFamily="34" charset="0"/>
+                <a:ea typeface="Georgia" pitchFamily="34" charset="-122"/>
+                <a:cs typeface="Georgia" pitchFamily="34" charset="-120"/>
+              </a:rPr>
+              <a:t>Senior ·  · IKS Curriculum</a:t>
+            </a:r>
+            <a:endParaRPr lang="en-US" sz="1200" dirty="0"/>
+          </a:p>
+        </p:txBody>
+      </p:sp>
+    </p:spTree>
+  </p:cSld>
+  <p:clrMapOvr>
+    <a:masterClrMapping/>
+  </p:clrMapOvr>
+</p:sld>
+</file>
+
+<file path=ppt/slides/slide12.xml><?xml version="1.0" encoding="utf-8"?>
+<p:sld xmlns:a="http://schemas.openxmlformats.org/drawingml/2006/main" xmlns:r="http://schemas.openxmlformats.org/officeDocument/2006/relationships" xmlns:p="http://schemas.openxmlformats.org/presentationml/2006/main">
+  <p:cSld name="Slide 12">
+    <p:bg>
+      <p:bgPr>
+        <a:solidFill>
+          <a:srgbClr val="FAF7F2"/>
+        </a:solidFill>
+      </p:bgPr>
+    </p:bg>
+    <p:spTree>
+      <p:nvGrpSpPr>
+        <p:cNvPr id="1" name=""/>
+        <p:cNvGrpSpPr/>
+        <p:nvPr/>
+      </p:nvGrpSpPr>
+      <p:grpSpPr>
+        <a:xfrm>
+          <a:off x="0" y="0"/>
+          <a:ext cx="0" cy="0"/>
+          <a:chOff x="0" y="0"/>
+          <a:chExt cx="0" cy="0"/>
+        </a:xfrm>
+      </p:grpSpPr>
+      <p:sp>
+        <p:nvSpPr>
+          <p:cNvPr id="2" name="Text 0"/>
+          <p:cNvSpPr/>
+          <p:nvPr/>
+        </p:nvSpPr>
+        <p:spPr>
+          <a:xfrm>
+            <a:off x="0" y="0"/>
+            <a:ext cx="9144000" cy="101501"/>
+          </a:xfrm>
+          <a:prstGeom prst="rect">
+            <a:avLst/>
+          </a:prstGeom>
+          <a:solidFill>
+            <a:srgbClr val="5D1D2E"/>
+          </a:solidFill>
+          <a:ln/>
+        </p:spPr>
+        <p:txBody>
+          <a:bodyPr wrap="square" rtlCol="0" anchor="ctr"/>
+          <a:lstStyle/>
+          <a:p>
+            <a:pPr indent="0" marL="0">
+              <a:buNone/>
+            </a:pPr>
+            <a:endParaRPr lang="en-US" dirty="0"/>
+          </a:p>
+        </p:txBody>
+      </p:sp>
+      <p:sp>
+        <p:nvSpPr>
+          <p:cNvPr id="3" name="Text 1"/>
+          <p:cNvSpPr/>
+          <p:nvPr/>
+        </p:nvSpPr>
+        <p:spPr>
+          <a:xfrm>
+            <a:off x="406301" y="457051"/>
+            <a:ext cx="8498026" cy="274290"/>
+          </a:xfrm>
+          <a:prstGeom prst="rect">
+            <a:avLst/>
+          </a:prstGeom>
+          <a:noFill/>
+          <a:ln/>
+        </p:spPr>
+        <p:txBody>
+          <a:bodyPr wrap="square" lIns="0" tIns="0" rIns="0" bIns="0" rtlCol="0" anchor="t"/>
+          <a:lstStyle/>
+          <a:p>
+            <a:pPr algn="l" indent="0" marL="0">
+              <a:lnSpc>
+                <a:spcPts val="2160"/>
+              </a:lnSpc>
+              <a:spcBef>
+                <a:spcPts val="600"/>
+              </a:spcBef>
+              <a:spcAft>
+                <a:spcPts val="800"/>
+              </a:spcAft>
+              <a:buNone/>
+            </a:pPr>
+            <a:r>
+              <a:rPr lang="en-US" sz="1800" b="1" dirty="0">
+                <a:solidFill>
+                  <a:srgbClr val="997929"/>
+                </a:solidFill>
+                <a:latin typeface="Times New Roman" pitchFamily="34" charset="0"/>
+                <a:ea typeface="Times New Roman" pitchFamily="34" charset="-122"/>
+                <a:cs typeface="Times New Roman" pitchFamily="34" charset="-120"/>
+              </a:rPr>
+              <a:t>Wrap-up (2 min)</a:t>
+            </a:r>
+            <a:endParaRPr lang="en-US" sz="1800" dirty="0"/>
+          </a:p>
+        </p:txBody>
+      </p:sp>
+      <p:sp>
+        <p:nvSpPr>
+          <p:cNvPr id="4" name="Text 2"/>
+          <p:cNvSpPr/>
+          <p:nvPr/>
+        </p:nvSpPr>
+        <p:spPr>
+          <a:xfrm>
+            <a:off x="634901" y="883593"/>
+            <a:ext cx="8102798" cy="281880"/>
+          </a:xfrm>
+          <a:prstGeom prst="rect">
+            <a:avLst/>
+          </a:prstGeom>
+          <a:noFill/>
+          <a:ln/>
+        </p:spPr>
+        <p:txBody>
+          <a:bodyPr wrap="square" lIns="0" tIns="0" rIns="0" bIns="0" rtlCol="0" anchor="t"/>
+          <a:lstStyle/>
+          <a:p>
+            <a:pPr algn="l" marL="342900" indent="-342900">
+              <a:lnSpc>
+                <a:spcPts val="1620"/>
+              </a:lnSpc>
+              <a:spcAft>
+                <a:spcPts val="300"/>
+              </a:spcAft>
+              <a:buSzPct val="100000"/>
+              <a:buChar char="•"/>
+            </a:pPr>
+            <a:r>
+              <a:rPr lang="en-US" sz="1200" dirty="0">
+                <a:solidFill>
+                  <a:srgbClr val="1A1A1A"/>
+                </a:solidFill>
+                <a:latin typeface="Georgia" pitchFamily="34" charset="0"/>
+                <a:ea typeface="Georgia" pitchFamily="34" charset="-122"/>
+                <a:cs typeface="Georgia" pitchFamily="34" charset="-120"/>
+              </a:rPr>
+              <a:t>Preview Day 6: </a:t>
+            </a:r>
+            <a:pPr algn="l" indent="0" marL="0">
+              <a:lnSpc>
+                <a:spcPts val="1620"/>
+              </a:lnSpc>
+              <a:spcAft>
+                <a:spcPts val="300"/>
+              </a:spcAft>
+              <a:buNone/>
+            </a:pPr>
+            <a:r>
+              <a:rPr lang="en-US" sz="1200" i="1" dirty="0">
+                <a:solidFill>
+                  <a:srgbClr val="1A1A1A"/>
+                </a:solidFill>
+                <a:latin typeface="Georgia" pitchFamily="34" charset="0"/>
+                <a:ea typeface="Georgia" pitchFamily="34" charset="-122"/>
+                <a:cs typeface="Georgia" pitchFamily="34" charset="-120"/>
+              </a:rPr>
+              <a:t>"Tomorrow — the historicity question. Was 'Vedic mathematics' actually Vedic?"</a:t>
+            </a:r>
+            <a:endParaRPr lang="en-US" sz="1200" dirty="0"/>
+          </a:p>
+        </p:txBody>
+      </p:sp>
+      <p:sp>
+        <p:nvSpPr>
+          <p:cNvPr id="5" name="Text 3"/>
+          <p:cNvSpPr/>
+          <p:nvPr/>
+        </p:nvSpPr>
+        <p:spPr>
+          <a:xfrm>
+            <a:off x="406301" y="4434929"/>
+            <a:ext cx="8498026" cy="213271"/>
+          </a:xfrm>
+          <a:prstGeom prst="rect">
+            <a:avLst/>
+          </a:prstGeom>
+          <a:noFill/>
+          <a:ln/>
+        </p:spPr>
+        <p:txBody>
+          <a:bodyPr wrap="square" lIns="0" tIns="0" rIns="0" bIns="0" rtlCol="0" anchor="t"/>
+          <a:lstStyle/>
+          <a:p>
+            <a:pPr algn="l" indent="0" marL="0">
+              <a:lnSpc>
+                <a:spcPts val="1680"/>
+              </a:lnSpc>
+              <a:spcBef>
+                <a:spcPts val="300"/>
+              </a:spcBef>
+              <a:spcAft>
+                <a:spcPts val="300"/>
+              </a:spcAft>
+              <a:buNone/>
+            </a:pPr>
+            <a:r>
+              <a:rPr lang="en-US" sz="1200" dirty="0">
+                <a:solidFill>
+                  <a:srgbClr val="1A1A1A"/>
+                </a:solidFill>
+                <a:latin typeface="Georgia" pitchFamily="34" charset="0"/>
+                <a:ea typeface="Georgia" pitchFamily="34" charset="-122"/>
+                <a:cs typeface="Georgia" pitchFamily="34" charset="-120"/>
+              </a:rPr>
+              <a:t>Senior ·  · IKS Curriculum</a:t>
+            </a:r>
+            <a:endParaRPr lang="en-US" sz="1200" dirty="0"/>
+          </a:p>
+        </p:txBody>
+      </p:sp>
+    </p:spTree>
+  </p:cSld>
+  <p:clrMapOvr>
+    <a:masterClrMapping/>
+  </p:clrMapOvr>
+</p:sld>
+</file>
+
+<file path=ppt/slides/slide13.xml><?xml version="1.0" encoding="utf-8"?>
+<p:sld xmlns:a="http://schemas.openxmlformats.org/drawingml/2006/main" xmlns:r="http://schemas.openxmlformats.org/officeDocument/2006/relationships" xmlns:p="http://schemas.openxmlformats.org/presentationml/2006/main">
+  <p:cSld name="Slide 13">
+    <p:bg>
+      <p:bgPr>
+        <a:solidFill>
+          <a:srgbClr val="FAF7F2"/>
+        </a:solidFill>
+      </p:bgPr>
+    </p:bg>
+    <p:spTree>
+      <p:nvGrpSpPr>
+        <p:cNvPr id="1" name=""/>
+        <p:cNvGrpSpPr/>
+        <p:nvPr/>
+      </p:nvGrpSpPr>
+      <p:grpSpPr>
+        <a:xfrm>
+          <a:off x="0" y="0"/>
+          <a:ext cx="0" cy="0"/>
+          <a:chOff x="0" y="0"/>
+          <a:chExt cx="0" cy="0"/>
+        </a:xfrm>
+      </p:grpSpPr>
+      <p:sp>
+        <p:nvSpPr>
+          <p:cNvPr id="2" name="Text 0"/>
+          <p:cNvSpPr/>
+          <p:nvPr/>
+        </p:nvSpPr>
+        <p:spPr>
+          <a:xfrm>
+            <a:off x="0" y="0"/>
+            <a:ext cx="9144000" cy="101501"/>
+          </a:xfrm>
+          <a:prstGeom prst="rect">
+            <a:avLst/>
+          </a:prstGeom>
+          <a:solidFill>
+            <a:srgbClr val="5D1D2E"/>
+          </a:solidFill>
+          <a:ln/>
+        </p:spPr>
+        <p:txBody>
+          <a:bodyPr wrap="square" rtlCol="0" anchor="ctr"/>
+          <a:lstStyle/>
+          <a:p>
+            <a:pPr indent="0" marL="0">
+              <a:buNone/>
+            </a:pPr>
+            <a:endParaRPr lang="en-US" dirty="0"/>
+          </a:p>
+        </p:txBody>
+      </p:sp>
+      <p:sp>
+        <p:nvSpPr>
+          <p:cNvPr id="3" name="Text 1"/>
+          <p:cNvSpPr/>
+          <p:nvPr/>
+        </p:nvSpPr>
+        <p:spPr>
+          <a:xfrm>
+            <a:off x="406301" y="457051"/>
+            <a:ext cx="8498026" cy="274290"/>
+          </a:xfrm>
+          <a:prstGeom prst="rect">
+            <a:avLst/>
+          </a:prstGeom>
+          <a:noFill/>
+          <a:ln/>
+        </p:spPr>
+        <p:txBody>
+          <a:bodyPr wrap="square" lIns="0" tIns="0" rIns="0" bIns="0" rtlCol="0" anchor="t"/>
+          <a:lstStyle/>
+          <a:p>
+            <a:pPr algn="l" indent="0" marL="0">
+              <a:lnSpc>
+                <a:spcPts val="2160"/>
+              </a:lnSpc>
+              <a:spcBef>
+                <a:spcPts val="600"/>
+              </a:spcBef>
+              <a:spcAft>
+                <a:spcPts val="800"/>
+              </a:spcAft>
+              <a:buNone/>
+            </a:pPr>
+            <a:r>
+              <a:rPr lang="en-US" sz="1800" b="1" dirty="0">
+                <a:solidFill>
+                  <a:srgbClr val="997929"/>
+                </a:solidFill>
+                <a:latin typeface="Times New Roman" pitchFamily="34" charset="0"/>
+                <a:ea typeface="Times New Roman" pitchFamily="34" charset="-122"/>
+                <a:cs typeface="Times New Roman" pitchFamily="34" charset="-120"/>
+              </a:rPr>
+              <a:t>Differentiation</a:t>
+            </a:r>
+            <a:endParaRPr lang="en-US" sz="1800" dirty="0"/>
+          </a:p>
+        </p:txBody>
+      </p:sp>
+      <p:sp>
+        <p:nvSpPr>
+          <p:cNvPr id="4" name="Text 2"/>
+          <p:cNvSpPr/>
+          <p:nvPr/>
+        </p:nvSpPr>
+        <p:spPr>
+          <a:xfrm>
+            <a:off x="634901" y="883593"/>
+            <a:ext cx="8102798" cy="525661"/>
+          </a:xfrm>
+          <a:prstGeom prst="rect">
+            <a:avLst/>
+          </a:prstGeom>
+          <a:noFill/>
+          <a:ln/>
+        </p:spPr>
+        <p:txBody>
+          <a:bodyPr wrap="square" lIns="0" tIns="0" rIns="0" bIns="0" rtlCol="0" anchor="t"/>
+          <a:lstStyle/>
+          <a:p>
+            <a:pPr algn="l" marL="342900" indent="-342900">
+              <a:lnSpc>
+                <a:spcPts val="1620"/>
+              </a:lnSpc>
+              <a:spcAft>
+                <a:spcPts val="300"/>
+              </a:spcAft>
+              <a:buSzPct val="100000"/>
+              <a:buChar char="•"/>
+            </a:pPr>
+            <a:r>
+              <a:rPr lang="en-US" sz="1200" b="1" dirty="0">
+                <a:solidFill>
+                  <a:srgbClr val="1A1A1A"/>
+                </a:solidFill>
+                <a:latin typeface="Georgia" pitchFamily="34" charset="0"/>
+                <a:ea typeface="Georgia" pitchFamily="34" charset="-122"/>
+                <a:cs typeface="Georgia" pitchFamily="34" charset="-120"/>
+              </a:rPr>
+              <a:t>Tier up:</a:t>
+            </a:r>
+            <a:pPr algn="l" indent="0" marL="0">
+              <a:lnSpc>
+                <a:spcPts val="1620"/>
+              </a:lnSpc>
+              <a:spcAft>
+                <a:spcPts val="300"/>
+              </a:spcAft>
+              <a:buNone/>
+            </a:pPr>
+            <a:r>
+              <a:rPr lang="en-US" sz="1200" dirty="0">
+                <a:solidFill>
+                  <a:srgbClr val="1A1A1A"/>
+                </a:solidFill>
+                <a:latin typeface="Georgia" pitchFamily="34" charset="0"/>
+                <a:ea typeface="Georgia" pitchFamily="34" charset="-122"/>
+                <a:cs typeface="Georgia" pitchFamily="34" charset="-120"/>
+              </a:rPr>
+              <a:t> Base 2 (binary) dot method. (Trivial: every column entry is 0 or 1; the dot marks whenever you have 2 ones.)</a:t>
+            </a:r>
+            <a:endParaRPr lang="en-US" sz="1200" dirty="0"/>
+          </a:p>
+          <a:p>
+            <a:pPr algn="l" marL="342900" indent="-342900">
+              <a:lnSpc>
+                <a:spcPts val="1620"/>
+              </a:lnSpc>
+              <a:spcAft>
+                <a:spcPts val="300"/>
+              </a:spcAft>
+              <a:buSzPct val="100000"/>
+              <a:buChar char="•"/>
+            </a:pPr>
+            <a:r>
+              <a:rPr lang="en-US" sz="1200" b="1" dirty="0">
+                <a:solidFill>
+                  <a:srgbClr val="1A1A1A"/>
+                </a:solidFill>
+                <a:latin typeface="Georgia" pitchFamily="34" charset="0"/>
+                <a:ea typeface="Georgia" pitchFamily="34" charset="-122"/>
+                <a:cs typeface="Georgia" pitchFamily="34" charset="-120"/>
+              </a:rPr>
+              <a:t>Tier down:</a:t>
+            </a:r>
+            <a:pPr algn="l" indent="0" marL="0">
+              <a:lnSpc>
+                <a:spcPts val="1620"/>
+              </a:lnSpc>
+              <a:spcAft>
+                <a:spcPts val="300"/>
+              </a:spcAft>
+              <a:buNone/>
+            </a:pPr>
+            <a:r>
+              <a:rPr lang="en-US" sz="1200" dirty="0">
+                <a:solidFill>
+                  <a:srgbClr val="1A1A1A"/>
+                </a:solidFill>
+                <a:latin typeface="Georgia" pitchFamily="34" charset="0"/>
+                <a:ea typeface="Georgia" pitchFamily="34" charset="-122"/>
+                <a:cs typeface="Georgia" pitchFamily="34" charset="-120"/>
+              </a:rPr>
+              <a:t> Stay in base 10; review the procedure.</a:t>
+            </a:r>
+            <a:endParaRPr lang="en-US" sz="1200" dirty="0"/>
+          </a:p>
+        </p:txBody>
+      </p:sp>
+      <p:sp>
+        <p:nvSpPr>
+          <p:cNvPr id="5" name="Text 3"/>
+          <p:cNvSpPr/>
+          <p:nvPr/>
+        </p:nvSpPr>
+        <p:spPr>
+          <a:xfrm>
+            <a:off x="406301" y="4434929"/>
+            <a:ext cx="8498026" cy="213271"/>
+          </a:xfrm>
+          <a:prstGeom prst="rect">
+            <a:avLst/>
+          </a:prstGeom>
+          <a:noFill/>
+          <a:ln/>
+        </p:spPr>
+        <p:txBody>
+          <a:bodyPr wrap="square" lIns="0" tIns="0" rIns="0" bIns="0" rtlCol="0" anchor="t"/>
+          <a:lstStyle/>
+          <a:p>
+            <a:pPr algn="l" indent="0" marL="0">
+              <a:lnSpc>
+                <a:spcPts val="1680"/>
+              </a:lnSpc>
+              <a:spcBef>
+                <a:spcPts val="300"/>
+              </a:spcBef>
+              <a:spcAft>
+                <a:spcPts val="300"/>
+              </a:spcAft>
+              <a:buNone/>
+            </a:pPr>
+            <a:r>
+              <a:rPr lang="en-US" sz="1200" dirty="0">
+                <a:solidFill>
+                  <a:srgbClr val="1A1A1A"/>
+                </a:solidFill>
+                <a:latin typeface="Georgia" pitchFamily="34" charset="0"/>
+                <a:ea typeface="Georgia" pitchFamily="34" charset="-122"/>
+                <a:cs typeface="Georgia" pitchFamily="34" charset="-120"/>
+              </a:rPr>
+              <a:t>Senior ·  · IKS Curriculum</a:t>
+            </a:r>
+            <a:endParaRPr lang="en-US" sz="1200" dirty="0"/>
+          </a:p>
+        </p:txBody>
+      </p:sp>
+    </p:spTree>
+  </p:cSld>
+  <p:clrMapOvr>
+    <a:masterClrMapping/>
+  </p:clrMapOvr>
+</p:sld>
+</file>
+
+<file path=ppt/slides/slide14.xml><?xml version="1.0" encoding="utf-8"?>
+<p:sld xmlns:a="http://schemas.openxmlformats.org/drawingml/2006/main" xmlns:r="http://schemas.openxmlformats.org/officeDocument/2006/relationships" xmlns:p="http://schemas.openxmlformats.org/presentationml/2006/main">
+  <p:cSld name="Slide 14">
+    <p:bg>
+      <p:bgPr>
+        <a:solidFill>
+          <a:srgbClr val="FAF7F2"/>
+        </a:solidFill>
+      </p:bgPr>
+    </p:bg>
+    <p:spTree>
+      <p:nvGrpSpPr>
+        <p:cNvPr id="1" name=""/>
+        <p:cNvGrpSpPr/>
+        <p:nvPr/>
+      </p:nvGrpSpPr>
+      <p:grpSpPr>
+        <a:xfrm>
+          <a:off x="0" y="0"/>
+          <a:ext cx="0" cy="0"/>
+          <a:chOff x="0" y="0"/>
+          <a:chExt cx="0" cy="0"/>
+        </a:xfrm>
+      </p:grpSpPr>
+      <p:sp>
+        <p:nvSpPr>
+          <p:cNvPr id="2" name="Text 0"/>
+          <p:cNvSpPr/>
+          <p:nvPr/>
+        </p:nvSpPr>
+        <p:spPr>
+          <a:xfrm>
+            <a:off x="0" y="0"/>
+            <a:ext cx="9144000" cy="101501"/>
+          </a:xfrm>
+          <a:prstGeom prst="rect">
+            <a:avLst/>
+          </a:prstGeom>
+          <a:solidFill>
+            <a:srgbClr val="5D1D2E"/>
+          </a:solidFill>
+          <a:ln/>
+        </p:spPr>
+        <p:txBody>
+          <a:bodyPr wrap="square" rtlCol="0" anchor="ctr"/>
+          <a:lstStyle/>
+          <a:p>
+            <a:pPr indent="0" marL="0">
+              <a:buNone/>
+            </a:pPr>
+            <a:endParaRPr lang="en-US" dirty="0"/>
+          </a:p>
+        </p:txBody>
+      </p:sp>
+      <p:sp>
+        <p:nvSpPr>
+          <p:cNvPr id="3" name="Text 1"/>
+          <p:cNvSpPr/>
+          <p:nvPr/>
+        </p:nvSpPr>
+        <p:spPr>
+          <a:xfrm>
+            <a:off x="406301" y="457051"/>
+            <a:ext cx="8498026" cy="274290"/>
+          </a:xfrm>
+          <a:prstGeom prst="rect">
+            <a:avLst/>
+          </a:prstGeom>
+          <a:noFill/>
+          <a:ln/>
+        </p:spPr>
+        <p:txBody>
+          <a:bodyPr wrap="square" lIns="0" tIns="0" rIns="0" bIns="0" rtlCol="0" anchor="t"/>
+          <a:lstStyle/>
+          <a:p>
+            <a:pPr algn="l" indent="0" marL="0">
+              <a:lnSpc>
+                <a:spcPts val="2160"/>
+              </a:lnSpc>
+              <a:spcBef>
+                <a:spcPts val="600"/>
+              </a:spcBef>
+              <a:spcAft>
+                <a:spcPts val="800"/>
+              </a:spcAft>
+              <a:buNone/>
+            </a:pPr>
+            <a:r>
+              <a:rPr lang="en-US" sz="1800" b="1" dirty="0">
+                <a:solidFill>
+                  <a:srgbClr val="997929"/>
+                </a:solidFill>
+                <a:latin typeface="Times New Roman" pitchFamily="34" charset="0"/>
+                <a:ea typeface="Times New Roman" pitchFamily="34" charset="-122"/>
+                <a:cs typeface="Times New Roman" pitchFamily="34" charset="-120"/>
+              </a:rPr>
+              <a:t>Teacher notes</a:t>
+            </a:r>
+            <a:endParaRPr lang="en-US" sz="1800" dirty="0"/>
+          </a:p>
+        </p:txBody>
+      </p:sp>
+      <p:sp>
+        <p:nvSpPr>
+          <p:cNvPr id="4" name="Text 2"/>
+          <p:cNvSpPr/>
+          <p:nvPr/>
+        </p:nvSpPr>
+        <p:spPr>
+          <a:xfrm>
+            <a:off x="634901" y="883593"/>
+            <a:ext cx="8102798" cy="525661"/>
+          </a:xfrm>
+          <a:prstGeom prst="rect">
+            <a:avLst/>
+          </a:prstGeom>
+          <a:noFill/>
+          <a:ln/>
+        </p:spPr>
+        <p:txBody>
+          <a:bodyPr wrap="square" lIns="0" tIns="0" rIns="0" bIns="0" rtlCol="0" anchor="t"/>
+          <a:lstStyle/>
+          <a:p>
+            <a:pPr algn="l" marL="342900" indent="-342900">
+              <a:lnSpc>
+                <a:spcPts val="1620"/>
+              </a:lnSpc>
+              <a:spcAft>
+                <a:spcPts val="300"/>
+              </a:spcAft>
+              <a:buSzPct val="100000"/>
+              <a:buChar char="•"/>
+            </a:pPr>
+            <a:r>
+              <a:rPr lang="en-US" sz="1200" dirty="0">
+                <a:solidFill>
+                  <a:srgbClr val="1A1A1A"/>
+                </a:solidFill>
+                <a:latin typeface="Georgia" pitchFamily="34" charset="0"/>
+                <a:ea typeface="Georgia" pitchFamily="34" charset="-122"/>
+                <a:cs typeface="Georgia" pitchFamily="34" charset="-120"/>
+              </a:rPr>
+              <a:t>The base-</a:t>
+            </a:r>
+            <a:pPr algn="l" indent="0" marL="0">
+              <a:lnSpc>
+                <a:spcPts val="1620"/>
+              </a:lnSpc>
+              <a:spcAft>
+                <a:spcPts val="300"/>
+              </a:spcAft>
+              <a:buNone/>
+            </a:pPr>
+            <a:r>
+              <a:rPr lang="en-US" sz="1200" i="1" dirty="0">
+                <a:solidFill>
+                  <a:srgbClr val="1A1A1A"/>
+                </a:solidFill>
+                <a:latin typeface="Georgia" pitchFamily="34" charset="0"/>
+                <a:ea typeface="Georgia" pitchFamily="34" charset="-122"/>
+                <a:cs typeface="Georgia" pitchFamily="34" charset="-120"/>
+              </a:rPr>
+              <a:t>n</a:t>
+            </a:r>
+            <a:pPr algn="l" indent="0" marL="0">
+              <a:lnSpc>
+                <a:spcPts val="1620"/>
+              </a:lnSpc>
+              <a:spcAft>
+                <a:spcPts val="300"/>
+              </a:spcAft>
+              <a:buNone/>
+            </a:pPr>
+            <a:r>
+              <a:rPr lang="en-US" sz="1200" dirty="0">
+                <a:solidFill>
+                  <a:srgbClr val="1A1A1A"/>
+                </a:solidFill>
+                <a:latin typeface="Georgia" pitchFamily="34" charset="0"/>
+                <a:ea typeface="Georgia" pitchFamily="34" charset="-122"/>
+                <a:cs typeface="Georgia" pitchFamily="34" charset="-120"/>
+              </a:rPr>
+              <a:t> extension is a beautiful "of course it works" moment for math-track students. Lean into it.</a:t>
+            </a:r>
+            <a:endParaRPr lang="en-US" sz="1200" dirty="0"/>
+          </a:p>
+          <a:p>
+            <a:pPr algn="l" marL="342900" indent="-342900">
+              <a:lnSpc>
+                <a:spcPts val="1620"/>
+              </a:lnSpc>
+              <a:spcAft>
+                <a:spcPts val="300"/>
+              </a:spcAft>
+              <a:buSzPct val="100000"/>
+              <a:buChar char="•"/>
+            </a:pPr>
+            <a:r>
+              <a:rPr lang="en-US" sz="1200" dirty="0">
+                <a:solidFill>
+                  <a:srgbClr val="1A1A1A"/>
+                </a:solidFill>
+                <a:latin typeface="Georgia" pitchFamily="34" charset="0"/>
+                <a:ea typeface="Georgia" pitchFamily="34" charset="-122"/>
+                <a:cs typeface="Georgia" pitchFamily="34" charset="-120"/>
+              </a:rPr>
+              <a:t>For computer-science-track students, base 2 dot method = binary half-adder logic.</a:t>
+            </a:r>
+            <a:endParaRPr lang="en-US" sz="1200" dirty="0"/>
+          </a:p>
+        </p:txBody>
+      </p:sp>
+      <p:sp>
+        <p:nvSpPr>
+          <p:cNvPr id="5" name="Text 3"/>
+          <p:cNvSpPr/>
+          <p:nvPr/>
+        </p:nvSpPr>
+        <p:spPr>
+          <a:xfrm>
+            <a:off x="406301" y="4434929"/>
+            <a:ext cx="8498026" cy="213271"/>
+          </a:xfrm>
+          <a:prstGeom prst="rect">
+            <a:avLst/>
+          </a:prstGeom>
+          <a:noFill/>
+          <a:ln/>
+        </p:spPr>
+        <p:txBody>
+          <a:bodyPr wrap="square" lIns="0" tIns="0" rIns="0" bIns="0" rtlCol="0" anchor="t"/>
+          <a:lstStyle/>
+          <a:p>
+            <a:pPr algn="l" indent="0" marL="0">
+              <a:lnSpc>
+                <a:spcPts val="1680"/>
+              </a:lnSpc>
+              <a:spcBef>
+                <a:spcPts val="300"/>
+              </a:spcBef>
+              <a:spcAft>
+                <a:spcPts val="300"/>
+              </a:spcAft>
+              <a:buNone/>
+            </a:pPr>
+            <a:r>
+              <a:rPr lang="en-US" sz="1200" dirty="0">
+                <a:solidFill>
+                  <a:srgbClr val="1A1A1A"/>
+                </a:solidFill>
+                <a:latin typeface="Georgia" pitchFamily="34" charset="0"/>
+                <a:ea typeface="Georgia" pitchFamily="34" charset="-122"/>
+                <a:cs typeface="Georgia" pitchFamily="34" charset="-120"/>
+              </a:rPr>
+              <a:t>Senior ·  · IKS Curriculum</a:t>
+            </a:r>
+            <a:endParaRPr lang="en-US" sz="1200" dirty="0"/>
+          </a:p>
+        </p:txBody>
+      </p:sp>
+    </p:spTree>
+  </p:cSld>
+  <p:clrMapOvr>
+    <a:masterClrMapping/>
+  </p:clrMapOvr>
+</p:sld>
+</file>
+
+<file path=ppt/slides/slide15.xml><?xml version="1.0" encoding="utf-8"?>
+<p:sld xmlns:a="http://schemas.openxmlformats.org/drawingml/2006/main" xmlns:r="http://schemas.openxmlformats.org/officeDocument/2006/relationships" xmlns:p="http://schemas.openxmlformats.org/presentationml/2006/main">
+  <p:cSld name="Slide 15">
+    <p:bg>
+      <p:bgPr>
+        <a:solidFill>
+          <a:srgbClr val="FAF7F2"/>
+        </a:solidFill>
+      </p:bgPr>
+    </p:bg>
+    <p:spTree>
+      <p:nvGrpSpPr>
+        <p:cNvPr id="1" name=""/>
+        <p:cNvGrpSpPr/>
+        <p:nvPr/>
+      </p:nvGrpSpPr>
+      <p:grpSpPr>
+        <a:xfrm>
+          <a:off x="0" y="0"/>
+          <a:ext cx="0" cy="0"/>
+          <a:chOff x="0" y="0"/>
+          <a:chExt cx="0" cy="0"/>
+        </a:xfrm>
+      </p:grpSpPr>
+      <p:sp>
+        <p:nvSpPr>
+          <p:cNvPr id="2" name="Text 0"/>
+          <p:cNvSpPr/>
+          <p:nvPr/>
+        </p:nvSpPr>
+        <p:spPr>
+          <a:xfrm>
+            <a:off x="0" y="0"/>
+            <a:ext cx="9144000" cy="101501"/>
+          </a:xfrm>
+          <a:prstGeom prst="rect">
+            <a:avLst/>
+          </a:prstGeom>
+          <a:solidFill>
+            <a:srgbClr val="5D1D2E"/>
+          </a:solidFill>
+          <a:ln/>
+        </p:spPr>
+        <p:txBody>
+          <a:bodyPr wrap="square" rtlCol="0" anchor="ctr"/>
+          <a:lstStyle/>
+          <a:p>
+            <a:pPr indent="0" marL="0">
+              <a:buNone/>
+            </a:pPr>
+            <a:endParaRPr lang="en-US" dirty="0"/>
+          </a:p>
+        </p:txBody>
+      </p:sp>
+      <p:sp>
+        <p:nvSpPr>
+          <p:cNvPr id="3" name="Text 1"/>
+          <p:cNvSpPr/>
+          <p:nvPr/>
+        </p:nvSpPr>
+        <p:spPr>
+          <a:xfrm>
+            <a:off x="406301" y="457051"/>
+            <a:ext cx="8498026" cy="274290"/>
+          </a:xfrm>
+          <a:prstGeom prst="rect">
+            <a:avLst/>
+          </a:prstGeom>
+          <a:noFill/>
+          <a:ln/>
+        </p:spPr>
+        <p:txBody>
+          <a:bodyPr wrap="square" lIns="0" tIns="0" rIns="0" bIns="0" rtlCol="0" anchor="t"/>
+          <a:lstStyle/>
+          <a:p>
+            <a:pPr algn="l" indent="0" marL="0">
+              <a:lnSpc>
+                <a:spcPts val="2160"/>
+              </a:lnSpc>
+              <a:spcBef>
+                <a:spcPts val="600"/>
+              </a:spcBef>
+              <a:spcAft>
+                <a:spcPts val="800"/>
+              </a:spcAft>
+              <a:buNone/>
+            </a:pPr>
+            <a:r>
+              <a:rPr lang="en-US" sz="1800" b="1" dirty="0">
+                <a:solidFill>
+                  <a:srgbClr val="997929"/>
+                </a:solidFill>
+                <a:latin typeface="Times New Roman" pitchFamily="34" charset="0"/>
+                <a:ea typeface="Times New Roman" pitchFamily="34" charset="-122"/>
+                <a:cs typeface="Times New Roman" pitchFamily="34" charset="-120"/>
+              </a:rPr>
               <a:t>Citation(s) used</a:t>
             </a:r>
             <a:endParaRPr lang="en-US" sz="1800" dirty="0"/>
@@ -2661,7 +3973,7 @@
                 <a:ea typeface="Times New Roman" pitchFamily="34" charset="-122"/>
                 <a:cs typeface="Times New Roman" pitchFamily="34" charset="-120"/>
               </a:rPr>
-              <a:t>Materials</a:t>
+              <a:t>Learning objective</a:t>
             </a:r>
             <a:endParaRPr lang="en-US" sz="1800" dirty="0"/>
           </a:p>
@@ -2676,7 +3988,7 @@
         <p:spPr>
           <a:xfrm>
             <a:off x="406301" y="870942"/>
-            <a:ext cx="8498026" cy="213271"/>
+            <a:ext cx="8498026" cy="426541"/>
           </a:xfrm>
           <a:prstGeom prst="rect">
             <a:avLst/>
@@ -2709,7 +4021,7 @@
                 <a:ea typeface="Georgia" pitchFamily="34" charset="-122"/>
                 <a:cs typeface="Georgia" pitchFamily="34" charset="-120"/>
               </a:rPr>
-              <a:t>– Whiteboard – Base-conversion reference card – Mixed-base practice sheets</a:t>
+              <a:t>Students extend the dot method to base 8 and base 16, identify what changes and what stays the same, and complete the formative quiz.</a:t>
             </a:r>
             <a:endParaRPr lang="en-US" sz="1200" dirty="0"/>
           </a:p>
@@ -2867,7 +4179,7 @@
                 <a:ea typeface="Times New Roman" pitchFamily="34" charset="-122"/>
                 <a:cs typeface="Times New Roman" pitchFamily="34" charset="-120"/>
               </a:rPr>
-              <a:t>Flow</a:t>
+              <a:t>Materials</a:t>
             </a:r>
             <a:endParaRPr lang="en-US" sz="1800" dirty="0"/>
           </a:p>
@@ -2876,6 +4188,100 @@
       <p:sp>
         <p:nvSpPr>
           <p:cNvPr id="4" name="Text 2"/>
+          <p:cNvSpPr/>
+          <p:nvPr/>
+        </p:nvSpPr>
+        <p:spPr>
+          <a:xfrm>
+            <a:off x="634901" y="883593"/>
+            <a:ext cx="8102798" cy="769441"/>
+          </a:xfrm>
+          <a:prstGeom prst="rect">
+            <a:avLst/>
+          </a:prstGeom>
+          <a:noFill/>
+          <a:ln/>
+        </p:spPr>
+        <p:txBody>
+          <a:bodyPr wrap="square" lIns="0" tIns="0" rIns="0" bIns="0" rtlCol="0" anchor="t"/>
+          <a:lstStyle/>
+          <a:p>
+            <a:pPr algn="l" marL="342900" indent="-342900">
+              <a:lnSpc>
+                <a:spcPts val="1620"/>
+              </a:lnSpc>
+              <a:spcAft>
+                <a:spcPts val="300"/>
+              </a:spcAft>
+              <a:buSzPct val="100000"/>
+              <a:buChar char="•"/>
+            </a:pPr>
+            <a:r>
+              <a:rPr lang="en-US" sz="1200" dirty="0">
+                <a:solidFill>
+                  <a:srgbClr val="1A1A1A"/>
+                </a:solidFill>
+                <a:latin typeface="Georgia" pitchFamily="34" charset="0"/>
+                <a:ea typeface="Georgia" pitchFamily="34" charset="-122"/>
+                <a:cs typeface="Georgia" pitchFamily="34" charset="-120"/>
+              </a:rPr>
+              <a:t>Whiteboard</a:t>
+            </a:r>
+            <a:endParaRPr lang="en-US" sz="1200" dirty="0"/>
+          </a:p>
+          <a:p>
+            <a:pPr algn="l" marL="342900" indent="-342900">
+              <a:lnSpc>
+                <a:spcPts val="1620"/>
+              </a:lnSpc>
+              <a:spcAft>
+                <a:spcPts val="300"/>
+              </a:spcAft>
+              <a:buSzPct val="100000"/>
+              <a:buChar char="•"/>
+            </a:pPr>
+            <a:r>
+              <a:rPr lang="en-US" sz="1200" dirty="0">
+                <a:solidFill>
+                  <a:srgbClr val="1A1A1A"/>
+                </a:solidFill>
+                <a:latin typeface="Georgia" pitchFamily="34" charset="0"/>
+                <a:ea typeface="Georgia" pitchFamily="34" charset="-122"/>
+                <a:cs typeface="Georgia" pitchFamily="34" charset="-120"/>
+              </a:rPr>
+              <a:t>Base-conversion reference card</a:t>
+            </a:r>
+            <a:endParaRPr lang="en-US" sz="1200" dirty="0"/>
+          </a:p>
+          <a:p>
+            <a:pPr algn="l" marL="342900" indent="-342900">
+              <a:lnSpc>
+                <a:spcPts val="1620"/>
+              </a:lnSpc>
+              <a:spcAft>
+                <a:spcPts val="300"/>
+              </a:spcAft>
+              <a:buSzPct val="100000"/>
+              <a:buChar char="•"/>
+            </a:pPr>
+            <a:r>
+              <a:rPr lang="en-US" sz="1200" dirty="0">
+                <a:solidFill>
+                  <a:srgbClr val="1A1A1A"/>
+                </a:solidFill>
+                <a:latin typeface="Georgia" pitchFamily="34" charset="0"/>
+                <a:ea typeface="Georgia" pitchFamily="34" charset="-122"/>
+                <a:cs typeface="Georgia" pitchFamily="34" charset="-120"/>
+              </a:rPr>
+              <a:t>Mixed-base practice sheets</a:t>
+            </a:r>
+            <a:endParaRPr lang="en-US" sz="1200" dirty="0"/>
+          </a:p>
+        </p:txBody>
+      </p:sp>
+      <p:sp>
+        <p:nvSpPr>
+          <p:cNvPr id="5" name="Text 3"/>
           <p:cNvSpPr/>
           <p:nvPr/>
         </p:nvSpPr>
@@ -3025,7 +4431,7 @@
                 <a:ea typeface="Times New Roman" pitchFamily="34" charset="-122"/>
                 <a:cs typeface="Times New Roman" pitchFamily="34" charset="-120"/>
               </a:rPr>
-              <a:t>Warm-up (5 min)</a:t>
+              <a:t>Flow</a:t>
             </a:r>
             <a:endParaRPr lang="en-US" sz="1800" dirty="0"/>
           </a:p>
@@ -3034,54 +4440,6 @@
       <p:sp>
         <p:nvSpPr>
           <p:cNvPr id="4" name="Text 2"/>
-          <p:cNvSpPr/>
-          <p:nvPr/>
-        </p:nvSpPr>
-        <p:spPr>
-          <a:xfrm>
-            <a:off x="406301" y="870942"/>
-            <a:ext cx="8498026" cy="213271"/>
-          </a:xfrm>
-          <a:prstGeom prst="rect">
-            <a:avLst/>
-          </a:prstGeom>
-          <a:noFill/>
-          <a:ln/>
-        </p:spPr>
-        <p:txBody>
-          <a:bodyPr wrap="square" lIns="0" tIns="0" rIns="0" bIns="0" rtlCol="0" anchor="t"/>
-          <a:lstStyle/>
-          <a:p>
-            <a:pPr algn="l" indent="0" marL="0">
-              <a:lnSpc>
-                <a:spcPts val="1680"/>
-              </a:lnSpc>
-              <a:spcBef>
-                <a:spcPts val="300"/>
-              </a:spcBef>
-              <a:spcAft>
-                <a:spcPts val="300"/>
-              </a:spcAft>
-              <a:buNone/>
-            </a:pPr>
-            <a:r>
-              <a:rPr lang="en-US" sz="1200" dirty="0">
-                <a:solidFill>
-                  <a:srgbClr val="1A1A1A"/>
-                </a:solidFill>
-                <a:latin typeface="Georgia" pitchFamily="34" charset="0"/>
-                <a:ea typeface="Georgia" pitchFamily="34" charset="-122"/>
-                <a:cs typeface="Georgia" pitchFamily="34" charset="-120"/>
-              </a:rPr>
-              <a:t>– Provocation: "Does the dot method work in base 8? Base 2?" – Take 2 student guesses. Don't resolve yet.</a:t>
-            </a:r>
-            <a:endParaRPr lang="en-US" sz="1200" dirty="0"/>
-          </a:p>
-        </p:txBody>
-      </p:sp>
-      <p:sp>
-        <p:nvSpPr>
-          <p:cNvPr id="5" name="Text 3"/>
           <p:cNvSpPr/>
           <p:nvPr/>
         </p:nvSpPr>
@@ -3231,7 +4589,7 @@
                 <a:ea typeface="Times New Roman" pitchFamily="34" charset="-122"/>
                 <a:cs typeface="Times New Roman" pitchFamily="34" charset="-120"/>
               </a:rPr>
-              <a:t>Core (20 min) — Generalisation</a:t>
+              <a:t>Warm-up (5 min)</a:t>
             </a:r>
             <a:endParaRPr lang="en-US" sz="1800" dirty="0"/>
           </a:p>
@@ -3246,7 +4604,7 @@
         <p:spPr>
           <a:xfrm>
             <a:off x="634901" y="883593"/>
-            <a:ext cx="8102798" cy="769441"/>
+            <a:ext cx="8102798" cy="525661"/>
           </a:xfrm>
           <a:prstGeom prst="rect">
             <a:avLst/>
@@ -3269,7 +4627,7 @@
               <a:buChar char="•"/>
             </a:pPr>
             <a:r>
-              <a:rPr lang="en-US" sz="1200" b="1" dirty="0">
+              <a:rPr lang="en-US" sz="1200" dirty="0">
                 <a:solidFill>
                   <a:srgbClr val="1A1A1A"/>
                 </a:solidFill>
@@ -3277,16 +4635,20 @@
                 <a:ea typeface="Georgia" pitchFamily="34" charset="-122"/>
                 <a:cs typeface="Georgia" pitchFamily="34" charset="-120"/>
               </a:rPr>
-              <a:t>In base 10:</a:t>
-            </a:r>
-            <a:pPr algn="l" indent="0" marL="0">
+              <a:t>Provocation: "Does the dot method work in base 8? Base 2?"</a:t>
+            </a:r>
+            <a:endParaRPr lang="en-US" sz="1200" dirty="0"/>
+          </a:p>
+          <a:p>
+            <a:pPr algn="l" marL="342900" indent="-342900">
               <a:lnSpc>
                 <a:spcPts val="1620"/>
               </a:lnSpc>
               <a:spcAft>
                 <a:spcPts val="300"/>
               </a:spcAft>
-              <a:buNone/>
+              <a:buSzPct val="100000"/>
+              <a:buChar char="•"/>
             </a:pPr>
             <a:r>
               <a:rPr lang="en-US" sz="1200" dirty="0">
@@ -3297,98 +4659,10 @@
                 <a:ea typeface="Georgia" pitchFamily="34" charset="-122"/>
                 <a:cs typeface="Georgia" pitchFamily="34" charset="-120"/>
               </a:rPr>
-              <a:t> the dot represents "10 used up" → 1 carried.</a:t>
+              <a:t>Take 2 student guesses. Don't resolve yet.</a:t>
             </a:r>
             <a:endParaRPr lang="en-US" sz="1200" dirty="0"/>
           </a:p>
-          <a:p>
-            <a:pPr algn="l" marL="342900" indent="-342900">
-              <a:lnSpc>
-                <a:spcPts val="1620"/>
-              </a:lnSpc>
-              <a:spcAft>
-                <a:spcPts val="300"/>
-              </a:spcAft>
-              <a:buSzPct val="100000"/>
-              <a:buChar char="•"/>
-            </a:pPr>
-            <a:r>
-              <a:rPr lang="en-US" sz="1200" b="1" dirty="0">
-                <a:solidFill>
-                  <a:srgbClr val="1A1A1A"/>
-                </a:solidFill>
-                <a:latin typeface="Georgia" pitchFamily="34" charset="0"/>
-                <a:ea typeface="Georgia" pitchFamily="34" charset="-122"/>
-                <a:cs typeface="Georgia" pitchFamily="34" charset="-120"/>
-              </a:rPr>
-              <a:t>In base 8:</a:t>
-            </a:r>
-            <a:pPr algn="l" indent="0" marL="0">
-              <a:lnSpc>
-                <a:spcPts val="1620"/>
-              </a:lnSpc>
-              <a:spcAft>
-                <a:spcPts val="300"/>
-              </a:spcAft>
-              <a:buNone/>
-            </a:pPr>
-            <a:r>
-              <a:rPr lang="en-US" sz="1200" dirty="0">
-                <a:solidFill>
-                  <a:srgbClr val="1A1A1A"/>
-                </a:solidFill>
-                <a:latin typeface="Georgia" pitchFamily="34" charset="0"/>
-                <a:ea typeface="Georgia" pitchFamily="34" charset="-122"/>
-                <a:cs typeface="Georgia" pitchFamily="34" charset="-120"/>
-              </a:rPr>
-              <a:t> the dot represents "8 used up" → 1 carried.</a:t>
-            </a:r>
-            <a:endParaRPr lang="en-US" sz="1200" dirty="0"/>
-          </a:p>
-          <a:p>
-            <a:pPr algn="l" marL="342900" indent="-342900">
-              <a:lnSpc>
-                <a:spcPts val="1620"/>
-              </a:lnSpc>
-              <a:spcAft>
-                <a:spcPts val="300"/>
-              </a:spcAft>
-              <a:buSzPct val="100000"/>
-              <a:buChar char="•"/>
-            </a:pPr>
-            <a:r>
-              <a:rPr lang="en-US" sz="1200" b="1" dirty="0">
-                <a:solidFill>
-                  <a:srgbClr val="1A1A1A"/>
-                </a:solidFill>
-                <a:latin typeface="Georgia" pitchFamily="34" charset="0"/>
-                <a:ea typeface="Georgia" pitchFamily="34" charset="-122"/>
-                <a:cs typeface="Georgia" pitchFamily="34" charset="-120"/>
-              </a:rPr>
-              <a:t>In base 16:</a:t>
-            </a:r>
-            <a:pPr algn="l" indent="0" marL="0">
-              <a:lnSpc>
-                <a:spcPts val="1620"/>
-              </a:lnSpc>
-              <a:spcAft>
-                <a:spcPts val="300"/>
-              </a:spcAft>
-              <a:buNone/>
-            </a:pPr>
-            <a:r>
-              <a:rPr lang="en-US" sz="1200" dirty="0">
-                <a:solidFill>
-                  <a:srgbClr val="1A1A1A"/>
-                </a:solidFill>
-                <a:latin typeface="Georgia" pitchFamily="34" charset="0"/>
-                <a:ea typeface="Georgia" pitchFamily="34" charset="-122"/>
-                <a:cs typeface="Georgia" pitchFamily="34" charset="-120"/>
-              </a:rPr>
-              <a:t> the dot represents "16 used up" → 1 carried.</a:t>
-            </a:r>
-            <a:endParaRPr lang="en-US" sz="1200" dirty="0"/>
-          </a:p>
         </p:txBody>
       </p:sp>
       <p:sp>
@@ -3399,872 +4673,7 @@
         </p:nvSpPr>
         <p:spPr>
           <a:xfrm>
-            <a:off x="634901" y="1754535"/>
-            <a:ext cx="8102798" cy="525661"/>
-          </a:xfrm>
-          <a:prstGeom prst="rect">
-            <a:avLst/>
-          </a:prstGeom>
-          <a:noFill/>
-          <a:ln/>
-        </p:spPr>
-        <p:txBody>
-          <a:bodyPr wrap="square" lIns="0" tIns="0" rIns="0" bIns="0" rtlCol="0" anchor="t"/>
-          <a:lstStyle/>
-          <a:p>
-            <a:pPr algn="l" marL="342900" indent="-342900">
-              <a:lnSpc>
-                <a:spcPts val="1620"/>
-              </a:lnSpc>
-              <a:spcAft>
-                <a:spcPts val="300"/>
-              </a:spcAft>
-              <a:buSzPct val="100000"/>
-              <a:buChar char="•"/>
-            </a:pPr>
-            <a:r>
-              <a:rPr lang="en-US" sz="1200" b="1" dirty="0">
-                <a:solidFill>
-                  <a:srgbClr val="1A1A1A"/>
-                </a:solidFill>
-                <a:latin typeface="Georgia" pitchFamily="34" charset="0"/>
-                <a:ea typeface="Georgia" pitchFamily="34" charset="-122"/>
-                <a:cs typeface="Georgia" pitchFamily="34" charset="-120"/>
-              </a:rPr>
-              <a:t>What changes:</a:t>
-            </a:r>
-            <a:pPr algn="l" indent="0" marL="0">
-              <a:lnSpc>
-                <a:spcPts val="1620"/>
-              </a:lnSpc>
-              <a:spcAft>
-                <a:spcPts val="300"/>
-              </a:spcAft>
-              <a:buNone/>
-            </a:pPr>
-            <a:r>
-              <a:rPr lang="en-US" sz="1200" dirty="0">
-                <a:solidFill>
-                  <a:srgbClr val="1A1A1A"/>
-                </a:solidFill>
-                <a:latin typeface="Georgia" pitchFamily="34" charset="0"/>
-                <a:ea typeface="Georgia" pitchFamily="34" charset="-122"/>
-                <a:cs typeface="Georgia" pitchFamily="34" charset="-120"/>
-              </a:rPr>
-              <a:t> the </a:t>
-            </a:r>
-            <a:pPr algn="l" indent="0" marL="0">
-              <a:lnSpc>
-                <a:spcPts val="1620"/>
-              </a:lnSpc>
-              <a:spcAft>
-                <a:spcPts val="300"/>
-              </a:spcAft>
-              <a:buNone/>
-            </a:pPr>
-            <a:r>
-              <a:rPr lang="en-US" sz="1200" i="1" dirty="0">
-                <a:solidFill>
-                  <a:srgbClr val="1A1A1A"/>
-                </a:solidFill>
-                <a:latin typeface="Georgia" pitchFamily="34" charset="0"/>
-                <a:ea typeface="Georgia" pitchFamily="34" charset="-122"/>
-                <a:cs typeface="Georgia" pitchFamily="34" charset="-120"/>
-              </a:rPr>
-              <a:t>target sum</a:t>
-            </a:r>
-            <a:pPr algn="l" indent="0" marL="0">
-              <a:lnSpc>
-                <a:spcPts val="1620"/>
-              </a:lnSpc>
-              <a:spcAft>
-                <a:spcPts val="300"/>
-              </a:spcAft>
-              <a:buNone/>
-            </a:pPr>
-            <a:r>
-              <a:rPr lang="en-US" sz="1200" dirty="0">
-                <a:solidFill>
-                  <a:srgbClr val="1A1A1A"/>
-                </a:solidFill>
-                <a:latin typeface="Georgia" pitchFamily="34" charset="0"/>
-                <a:ea typeface="Georgia" pitchFamily="34" charset="-122"/>
-                <a:cs typeface="Georgia" pitchFamily="34" charset="-120"/>
-              </a:rPr>
-              <a:t> (8 or 16 instead of 10).</a:t>
-            </a:r>
-            <a:endParaRPr lang="en-US" sz="1200" dirty="0"/>
-          </a:p>
-          <a:p>
-            <a:pPr algn="l" marL="342900" indent="-342900">
-              <a:lnSpc>
-                <a:spcPts val="1620"/>
-              </a:lnSpc>
-              <a:spcAft>
-                <a:spcPts val="300"/>
-              </a:spcAft>
-              <a:buSzPct val="100000"/>
-              <a:buChar char="•"/>
-            </a:pPr>
-            <a:r>
-              <a:rPr lang="en-US" sz="1200" b="1" dirty="0">
-                <a:solidFill>
-                  <a:srgbClr val="1A1A1A"/>
-                </a:solidFill>
-                <a:latin typeface="Georgia" pitchFamily="34" charset="0"/>
-                <a:ea typeface="Georgia" pitchFamily="34" charset="-122"/>
-                <a:cs typeface="Georgia" pitchFamily="34" charset="-120"/>
-              </a:rPr>
-              <a:t>What stays the same:</a:t>
-            </a:r>
-            <a:pPr algn="l" indent="0" marL="0">
-              <a:lnSpc>
-                <a:spcPts val="1620"/>
-              </a:lnSpc>
-              <a:spcAft>
-                <a:spcPts val="300"/>
-              </a:spcAft>
-              <a:buNone/>
-            </a:pPr>
-            <a:r>
-              <a:rPr lang="en-US" sz="1200" dirty="0">
-                <a:solidFill>
-                  <a:srgbClr val="1A1A1A"/>
-                </a:solidFill>
-                <a:latin typeface="Georgia" pitchFamily="34" charset="0"/>
-                <a:ea typeface="Georgia" pitchFamily="34" charset="-122"/>
-                <a:cs typeface="Georgia" pitchFamily="34" charset="-120"/>
-              </a:rPr>
-              <a:t> scan procedure; dot count = carry; units = leftover.</a:t>
-            </a:r>
-            <a:endParaRPr lang="en-US" sz="1200" dirty="0"/>
-          </a:p>
-        </p:txBody>
-      </p:sp>
-      <p:sp>
-        <p:nvSpPr>
-          <p:cNvPr id="6" name="Text 4"/>
-          <p:cNvSpPr/>
-          <p:nvPr/>
-        </p:nvSpPr>
-        <p:spPr>
-          <a:xfrm>
-            <a:off x="634901" y="2381696"/>
-            <a:ext cx="8102798" cy="281880"/>
-          </a:xfrm>
-          <a:prstGeom prst="rect">
-            <a:avLst/>
-          </a:prstGeom>
-          <a:noFill/>
-          <a:ln/>
-        </p:spPr>
-        <p:txBody>
-          <a:bodyPr wrap="square" lIns="0" tIns="0" rIns="0" bIns="0" rtlCol="0" anchor="t"/>
-          <a:lstStyle/>
-          <a:p>
-            <a:pPr algn="l" marL="342900" indent="-342900">
-              <a:lnSpc>
-                <a:spcPts val="1620"/>
-              </a:lnSpc>
-              <a:spcAft>
-                <a:spcPts val="300"/>
-              </a:spcAft>
-              <a:buSzPct val="100000"/>
-              <a:buChar char="•"/>
-            </a:pPr>
-            <a:r>
-              <a:rPr lang="en-US" sz="1200" b="1" dirty="0">
-                <a:solidFill>
-                  <a:srgbClr val="1A1A1A"/>
-                </a:solidFill>
-                <a:latin typeface="Georgia" pitchFamily="34" charset="0"/>
-                <a:ea typeface="Georgia" pitchFamily="34" charset="-122"/>
-                <a:cs typeface="Georgia" pitchFamily="34" charset="-120"/>
-              </a:rPr>
-              <a:t>Worked example in base 8:</a:t>
-            </a:r>
-            <a:endParaRPr lang="en-US" sz="1200" dirty="0"/>
-          </a:p>
-        </p:txBody>
-      </p:sp>
-      <p:sp>
-        <p:nvSpPr>
-          <p:cNvPr id="7" name="Text 5"/>
-          <p:cNvSpPr/>
-          <p:nvPr/>
-        </p:nvSpPr>
-        <p:spPr>
-          <a:xfrm>
-            <a:off x="406301" y="2765078"/>
-            <a:ext cx="8331398" cy="1650504"/>
-          </a:xfrm>
-          <a:prstGeom prst="rect">
-            <a:avLst/>
-          </a:prstGeom>
-          <a:solidFill>
-            <a:srgbClr val="FFFFFF"/>
-          </a:solidFill>
-          <a:ln/>
-        </p:spPr>
-        <p:txBody>
-          <a:bodyPr wrap="square" rtlCol="0" anchor="ctr"/>
-          <a:lstStyle/>
-          <a:p>
-            <a:pPr indent="0" marL="0">
-              <a:buNone/>
-            </a:pPr>
-            <a:endParaRPr lang="en-US" dirty="0"/>
-          </a:p>
-        </p:txBody>
-      </p:sp>
-      <p:sp>
-        <p:nvSpPr>
-          <p:cNvPr id="8" name="Shape 6"/>
-          <p:cNvSpPr/>
-          <p:nvPr/>
-        </p:nvSpPr>
-        <p:spPr>
-          <a:xfrm>
-            <a:off x="430113" y="2765078"/>
-            <a:ext cx="0" cy="1650504"/>
-          </a:xfrm>
-          <a:prstGeom prst="line">
-            <a:avLst/>
-          </a:prstGeom>
-          <a:noFill/>
-          <a:ln w="47625">
-            <a:solidFill>
-              <a:srgbClr val="5D1D2E"/>
-            </a:solidFill>
-            <a:prstDash val="solid"/>
-          </a:ln>
-        </p:spPr>
-      </p:sp>
-      <p:sp>
-        <p:nvSpPr>
-          <p:cNvPr id="9" name="Text 7"/>
-          <p:cNvSpPr/>
-          <p:nvPr/>
-        </p:nvSpPr>
-        <p:spPr>
-          <a:xfrm>
-            <a:off x="631627" y="2892028"/>
-            <a:ext cx="8086939" cy="174575"/>
-          </a:xfrm>
-          <a:prstGeom prst="rect">
-            <a:avLst/>
-          </a:prstGeom>
-          <a:noFill/>
-          <a:ln/>
-        </p:spPr>
-        <p:txBody>
-          <a:bodyPr wrap="square" lIns="0" tIns="0" rIns="0" bIns="0" rtlCol="0" anchor="t"/>
-          <a:lstStyle/>
-          <a:p>
-            <a:pPr algn="l" indent="0" marL="0">
-              <a:lnSpc>
-                <a:spcPts val="1375"/>
-              </a:lnSpc>
-              <a:buNone/>
-            </a:pPr>
-            <a:r>
-              <a:rPr lang="en-US" sz="1100" dirty="0">
-                <a:solidFill>
-                  <a:srgbClr val="1A1A1A"/>
-                </a:solidFill>
-                <a:latin typeface="Courier New" pitchFamily="34" charset="0"/>
-                <a:ea typeface="Courier New" pitchFamily="34" charset="-122"/>
-                <a:cs typeface="Courier New" pitchFamily="34" charset="-120"/>
-              </a:rPr>
-              <a:t>Column (base 8): 4, 7, 3, 6, 5</a:t>
-            </a:r>
-            <a:endParaRPr lang="en-US" sz="1100" dirty="0"/>
-          </a:p>
-        </p:txBody>
-      </p:sp>
-      <p:sp>
-        <p:nvSpPr>
-          <p:cNvPr id="10" name="Text 8"/>
-          <p:cNvSpPr/>
-          <p:nvPr/>
-        </p:nvSpPr>
-        <p:spPr>
-          <a:xfrm>
-            <a:off x="631627" y="3066604"/>
-            <a:ext cx="8086939" cy="174575"/>
-          </a:xfrm>
-          <a:prstGeom prst="rect">
-            <a:avLst/>
-          </a:prstGeom>
-          <a:noFill/>
-          <a:ln/>
-        </p:spPr>
-        <p:txBody>
-          <a:bodyPr wrap="square" lIns="0" tIns="0" rIns="0" bIns="0" rtlCol="0" anchor="t"/>
-          <a:lstStyle/>
-          <a:p>
-            <a:pPr algn="l" indent="0" marL="0">
-              <a:lnSpc>
-                <a:spcPts val="1375"/>
-              </a:lnSpc>
-              <a:buNone/>
-            </a:pPr>
-            <a:r>
-              <a:rPr lang="en-US" sz="1100" dirty="0">
-                <a:solidFill>
-                  <a:srgbClr val="1A1A1A"/>
-                </a:solidFill>
-                <a:latin typeface="Courier New" pitchFamily="34" charset="0"/>
-                <a:ea typeface="Courier New" pitchFamily="34" charset="-122"/>
-                <a:cs typeface="Courier New" pitchFamily="34" charset="-120"/>
-              </a:rPr>
-              <a:t>– Start total: 0</a:t>
-            </a:r>
-            <a:endParaRPr lang="en-US" sz="1100" dirty="0"/>
-          </a:p>
-        </p:txBody>
-      </p:sp>
-      <p:sp>
-        <p:nvSpPr>
-          <p:cNvPr id="11" name="Text 9"/>
-          <p:cNvSpPr/>
-          <p:nvPr/>
-        </p:nvSpPr>
-        <p:spPr>
-          <a:xfrm>
-            <a:off x="631627" y="3241179"/>
-            <a:ext cx="8086939" cy="174575"/>
-          </a:xfrm>
-          <a:prstGeom prst="rect">
-            <a:avLst/>
-          </a:prstGeom>
-          <a:noFill/>
-          <a:ln/>
-        </p:spPr>
-        <p:txBody>
-          <a:bodyPr wrap="square" lIns="0" tIns="0" rIns="0" bIns="0" rtlCol="0" anchor="t"/>
-          <a:lstStyle/>
-          <a:p>
-            <a:pPr algn="l" indent="0" marL="0">
-              <a:lnSpc>
-                <a:spcPts val="1375"/>
-              </a:lnSpc>
-              <a:buNone/>
-            </a:pPr>
-            <a:r>
-              <a:rPr lang="en-US" sz="1100" dirty="0">
-                <a:solidFill>
-                  <a:srgbClr val="1A1A1A"/>
-                </a:solidFill>
-                <a:latin typeface="Courier New" pitchFamily="34" charset="0"/>
-                <a:ea typeface="Courier New" pitchFamily="34" charset="-122"/>
-                <a:cs typeface="Courier New" pitchFamily="34" charset="-120"/>
-              </a:rPr>
-              <a:t>– +4 → 4</a:t>
-            </a:r>
-            <a:endParaRPr lang="en-US" sz="1100" dirty="0"/>
-          </a:p>
-        </p:txBody>
-      </p:sp>
-      <p:sp>
-        <p:nvSpPr>
-          <p:cNvPr id="12" name="Text 10"/>
-          <p:cNvSpPr/>
-          <p:nvPr/>
-        </p:nvSpPr>
-        <p:spPr>
-          <a:xfrm>
-            <a:off x="631627" y="3415754"/>
-            <a:ext cx="8086939" cy="174575"/>
-          </a:xfrm>
-          <a:prstGeom prst="rect">
-            <a:avLst/>
-          </a:prstGeom>
-          <a:noFill/>
-          <a:ln/>
-        </p:spPr>
-        <p:txBody>
-          <a:bodyPr wrap="square" lIns="0" tIns="0" rIns="0" bIns="0" rtlCol="0" anchor="t"/>
-          <a:lstStyle/>
-          <a:p>
-            <a:pPr algn="l" indent="0" marL="0">
-              <a:lnSpc>
-                <a:spcPts val="1375"/>
-              </a:lnSpc>
-              <a:buNone/>
-            </a:pPr>
-            <a:r>
-              <a:rPr lang="en-US" sz="1100" dirty="0">
-                <a:solidFill>
-                  <a:srgbClr val="1A1A1A"/>
-                </a:solidFill>
-                <a:latin typeface="Courier New" pitchFamily="34" charset="0"/>
-                <a:ea typeface="Courier New" pitchFamily="34" charset="-122"/>
-                <a:cs typeface="Courier New" pitchFamily="34" charset="-120"/>
-              </a:rPr>
-              <a:t>– +7 → 11_(10) = 13_(8). Wait — in base 8, 8 is "10". So 4+7 = 11_(10), which is 1 "8" + 3, so DOT on 7, total = 3.</a:t>
-            </a:r>
-            <a:endParaRPr lang="en-US" sz="1100" dirty="0"/>
-          </a:p>
-        </p:txBody>
-      </p:sp>
-      <p:sp>
-        <p:nvSpPr>
-          <p:cNvPr id="13" name="Text 11"/>
-          <p:cNvSpPr/>
-          <p:nvPr/>
-        </p:nvSpPr>
-        <p:spPr>
-          <a:xfrm>
-            <a:off x="631627" y="3590330"/>
-            <a:ext cx="8086939" cy="174575"/>
-          </a:xfrm>
-          <a:prstGeom prst="rect">
-            <a:avLst/>
-          </a:prstGeom>
-          <a:noFill/>
-          <a:ln/>
-        </p:spPr>
-        <p:txBody>
-          <a:bodyPr wrap="square" lIns="0" tIns="0" rIns="0" bIns="0" rtlCol="0" anchor="t"/>
-          <a:lstStyle/>
-          <a:p>
-            <a:pPr algn="l" indent="0" marL="0">
-              <a:lnSpc>
-                <a:spcPts val="1375"/>
-              </a:lnSpc>
-              <a:buNone/>
-            </a:pPr>
-            <a:r>
-              <a:rPr lang="en-US" sz="1100" dirty="0">
-                <a:solidFill>
-                  <a:srgbClr val="1A1A1A"/>
-                </a:solidFill>
-                <a:latin typeface="Courier New" pitchFamily="34" charset="0"/>
-                <a:ea typeface="Courier New" pitchFamily="34" charset="-122"/>
-                <a:cs typeface="Courier New" pitchFamily="34" charset="-120"/>
-              </a:rPr>
-              <a:t>– +3 → 6</a:t>
-            </a:r>
-            <a:endParaRPr lang="en-US" sz="1100" dirty="0"/>
-          </a:p>
-        </p:txBody>
-      </p:sp>
-      <p:sp>
-        <p:nvSpPr>
-          <p:cNvPr id="14" name="Text 12"/>
-          <p:cNvSpPr/>
-          <p:nvPr/>
-        </p:nvSpPr>
-        <p:spPr>
-          <a:xfrm>
-            <a:off x="631627" y="3764905"/>
-            <a:ext cx="8086939" cy="174575"/>
-          </a:xfrm>
-          <a:prstGeom prst="rect">
-            <a:avLst/>
-          </a:prstGeom>
-          <a:noFill/>
-          <a:ln/>
-        </p:spPr>
-        <p:txBody>
-          <a:bodyPr wrap="square" lIns="0" tIns="0" rIns="0" bIns="0" rtlCol="0" anchor="t"/>
-          <a:lstStyle/>
-          <a:p>
-            <a:pPr algn="l" indent="0" marL="0">
-              <a:lnSpc>
-                <a:spcPts val="1375"/>
-              </a:lnSpc>
-              <a:buNone/>
-            </a:pPr>
-            <a:r>
-              <a:rPr lang="en-US" sz="1100" dirty="0">
-                <a:solidFill>
-                  <a:srgbClr val="1A1A1A"/>
-                </a:solidFill>
-                <a:latin typeface="Courier New" pitchFamily="34" charset="0"/>
-                <a:ea typeface="Courier New" pitchFamily="34" charset="-122"/>
-                <a:cs typeface="Courier New" pitchFamily="34" charset="-120"/>
-              </a:rPr>
-              <a:t>– +6 → 12_(10) = 14_(8). That's 1 "8" + 4. DOT on 6, total = 4.</a:t>
-            </a:r>
-            <a:endParaRPr lang="en-US" sz="1100" dirty="0"/>
-          </a:p>
-        </p:txBody>
-      </p:sp>
-      <p:sp>
-        <p:nvSpPr>
-          <p:cNvPr id="15" name="Text 13"/>
-          <p:cNvSpPr/>
-          <p:nvPr/>
-        </p:nvSpPr>
-        <p:spPr>
-          <a:xfrm>
-            <a:off x="631627" y="3939480"/>
-            <a:ext cx="8086939" cy="174575"/>
-          </a:xfrm>
-          <a:prstGeom prst="rect">
-            <a:avLst/>
-          </a:prstGeom>
-          <a:noFill/>
-          <a:ln/>
-        </p:spPr>
-        <p:txBody>
-          <a:bodyPr wrap="square" lIns="0" tIns="0" rIns="0" bIns="0" rtlCol="0" anchor="t"/>
-          <a:lstStyle/>
-          <a:p>
-            <a:pPr algn="l" indent="0" marL="0">
-              <a:lnSpc>
-                <a:spcPts val="1375"/>
-              </a:lnSpc>
-              <a:buNone/>
-            </a:pPr>
-            <a:r>
-              <a:rPr lang="en-US" sz="1100" dirty="0">
-                <a:solidFill>
-                  <a:srgbClr val="1A1A1A"/>
-                </a:solidFill>
-                <a:latin typeface="Courier New" pitchFamily="34" charset="0"/>
-                <a:ea typeface="Courier New" pitchFamily="34" charset="-122"/>
-                <a:cs typeface="Courier New" pitchFamily="34" charset="-120"/>
-              </a:rPr>
-              <a:t>– +5 → 9_(10) = 11_(8). That's 1 "8" + 1. DOT on 5, total = 1.</a:t>
-            </a:r>
-            <a:endParaRPr lang="en-US" sz="1100" dirty="0"/>
-          </a:p>
-        </p:txBody>
-      </p:sp>
-      <p:sp>
-        <p:nvSpPr>
-          <p:cNvPr id="16" name="Text 14"/>
-          <p:cNvSpPr/>
-          <p:nvPr/>
-        </p:nvSpPr>
-        <p:spPr>
-          <a:xfrm>
-            <a:off x="631627" y="4114056"/>
-            <a:ext cx="8086939" cy="174575"/>
-          </a:xfrm>
-          <a:prstGeom prst="rect">
-            <a:avLst/>
-          </a:prstGeom>
-          <a:noFill/>
-          <a:ln/>
-        </p:spPr>
-        <p:txBody>
-          <a:bodyPr wrap="square" lIns="0" tIns="0" rIns="0" bIns="0" rtlCol="0" anchor="t"/>
-          <a:lstStyle/>
-          <a:p>
-            <a:pPr algn="l" indent="0" marL="0">
-              <a:lnSpc>
-                <a:spcPts val="1375"/>
-              </a:lnSpc>
-              <a:buNone/>
-            </a:pPr>
-            <a:r>
-              <a:rPr lang="en-US" sz="1100" dirty="0">
-                <a:solidFill>
-                  <a:srgbClr val="1A1A1A"/>
-                </a:solidFill>
-                <a:latin typeface="Courier New" pitchFamily="34" charset="0"/>
-                <a:ea typeface="Courier New" pitchFamily="34" charset="-122"/>
-                <a:cs typeface="Courier New" pitchFamily="34" charset="-120"/>
-              </a:rPr>
-              <a:t>– Final units (base 8): 1. Carries: 3.</a:t>
-            </a:r>
-            <a:endParaRPr lang="en-US" sz="1100" dirty="0"/>
-          </a:p>
-        </p:txBody>
-      </p:sp>
-      <p:sp>
-        <p:nvSpPr>
-          <p:cNvPr id="17" name="Text 15"/>
-          <p:cNvSpPr/>
-          <p:nvPr/>
-        </p:nvSpPr>
-        <p:spPr>
-          <a:xfrm>
-            <a:off x="406301" y="4504432"/>
-            <a:ext cx="8498026" cy="213271"/>
-          </a:xfrm>
-          <a:prstGeom prst="rect">
-            <a:avLst/>
-          </a:prstGeom>
-          <a:noFill/>
-          <a:ln/>
-        </p:spPr>
-        <p:txBody>
-          <a:bodyPr wrap="square" lIns="0" tIns="0" rIns="0" bIns="0" rtlCol="0" anchor="t"/>
-          <a:lstStyle/>
-          <a:p>
-            <a:pPr algn="l" indent="0" marL="0">
-              <a:lnSpc>
-                <a:spcPts val="1680"/>
-              </a:lnSpc>
-              <a:spcBef>
-                <a:spcPts val="300"/>
-              </a:spcBef>
-              <a:spcAft>
-                <a:spcPts val="300"/>
-              </a:spcAft>
-              <a:buNone/>
-            </a:pPr>
-            <a:r>
-              <a:rPr lang="en-US" sz="1200" dirty="0">
-                <a:solidFill>
-                  <a:srgbClr val="1A1A1A"/>
-                </a:solidFill>
-                <a:latin typeface="Georgia" pitchFamily="34" charset="0"/>
-                <a:ea typeface="Georgia" pitchFamily="34" charset="-122"/>
-                <a:cs typeface="Georgia" pitchFamily="34" charset="-120"/>
-              </a:rPr>
-              <a:t>Check: 4+7+3+6+5 = 25_(10) = 31_(8). Units = 1, "tens" (i.e. 8s) = 3. ✓</a:t>
-            </a:r>
-            <a:endParaRPr lang="en-US" sz="1200" dirty="0"/>
-          </a:p>
-        </p:txBody>
-      </p:sp>
-      <p:sp>
-        <p:nvSpPr>
-          <p:cNvPr id="18" name="Text 16"/>
-          <p:cNvSpPr/>
-          <p:nvPr/>
-        </p:nvSpPr>
-        <p:spPr>
-          <a:xfrm>
-            <a:off x="634901" y="4806553"/>
-            <a:ext cx="8102798" cy="281880"/>
-          </a:xfrm>
-          <a:prstGeom prst="rect">
-            <a:avLst/>
-          </a:prstGeom>
-          <a:noFill/>
-          <a:ln/>
-        </p:spPr>
-        <p:txBody>
-          <a:bodyPr wrap="square" lIns="0" tIns="0" rIns="0" bIns="0" rtlCol="0" anchor="t"/>
-          <a:lstStyle/>
-          <a:p>
-            <a:pPr algn="l" marL="342900" indent="-342900">
-              <a:lnSpc>
-                <a:spcPts val="1620"/>
-              </a:lnSpc>
-              <a:spcAft>
-                <a:spcPts val="300"/>
-              </a:spcAft>
-              <a:buSzPct val="100000"/>
-              <a:buChar char="•"/>
-            </a:pPr>
-            <a:r>
-              <a:rPr lang="en-US" sz="1200" b="1" dirty="0">
-                <a:solidFill>
-                  <a:srgbClr val="1A1A1A"/>
-                </a:solidFill>
-                <a:latin typeface="Georgia" pitchFamily="34" charset="0"/>
-                <a:ea typeface="Georgia" pitchFamily="34" charset="-122"/>
-                <a:cs typeface="Georgia" pitchFamily="34" charset="-120"/>
-              </a:rPr>
-              <a:t>The general rule:</a:t>
-            </a:r>
-            <a:endParaRPr lang="en-US" sz="1200" dirty="0"/>
-          </a:p>
-        </p:txBody>
-      </p:sp>
-      <p:sp>
-        <p:nvSpPr>
-          <p:cNvPr id="19" name="Text 17"/>
-          <p:cNvSpPr/>
-          <p:nvPr/>
-        </p:nvSpPr>
-        <p:spPr>
-          <a:xfrm>
-            <a:off x="406301" y="5177284"/>
-            <a:ext cx="8498026" cy="426541"/>
-          </a:xfrm>
-          <a:prstGeom prst="rect">
-            <a:avLst/>
-          </a:prstGeom>
-          <a:noFill/>
-          <a:ln/>
-        </p:spPr>
-        <p:txBody>
-          <a:bodyPr wrap="square" lIns="0" tIns="0" rIns="0" bIns="0" rtlCol="0" anchor="t"/>
-          <a:lstStyle/>
-          <a:p>
-            <a:pPr algn="l" indent="0" marL="0">
-              <a:lnSpc>
-                <a:spcPts val="1680"/>
-              </a:lnSpc>
-              <a:spcBef>
-                <a:spcPts val="300"/>
-              </a:spcBef>
-              <a:spcAft>
-                <a:spcPts val="300"/>
-              </a:spcAft>
-              <a:buNone/>
-            </a:pPr>
-            <a:r>
-              <a:rPr lang="en-US" sz="1200" dirty="0">
-                <a:solidFill>
-                  <a:srgbClr val="1A1A1A"/>
-                </a:solidFill>
-                <a:latin typeface="Georgia" pitchFamily="34" charset="0"/>
-                <a:ea typeface="Georgia" pitchFamily="34" charset="-122"/>
-                <a:cs typeface="Georgia" pitchFamily="34" charset="-120"/>
-              </a:rPr>
-              <a:t>&gt; In base </a:t>
-            </a:r>
-            <a:pPr algn="l" indent="0" marL="0">
-              <a:lnSpc>
-                <a:spcPts val="1680"/>
-              </a:lnSpc>
-              <a:spcBef>
-                <a:spcPts val="300"/>
-              </a:spcBef>
-              <a:spcAft>
-                <a:spcPts val="300"/>
-              </a:spcAft>
-              <a:buNone/>
-            </a:pPr>
-            <a:r>
-              <a:rPr lang="en-US" sz="1200" i="1" dirty="0">
-                <a:solidFill>
-                  <a:srgbClr val="1A1A1A"/>
-                </a:solidFill>
-                <a:latin typeface="Georgia" pitchFamily="34" charset="0"/>
-                <a:ea typeface="Georgia" pitchFamily="34" charset="-122"/>
-                <a:cs typeface="Georgia" pitchFamily="34" charset="-120"/>
-              </a:rPr>
-              <a:t>n</a:t>
-            </a:r>
-            <a:pPr algn="l" indent="0" marL="0">
-              <a:lnSpc>
-                <a:spcPts val="1680"/>
-              </a:lnSpc>
-              <a:spcBef>
-                <a:spcPts val="300"/>
-              </a:spcBef>
-              <a:spcAft>
-                <a:spcPts val="300"/>
-              </a:spcAft>
-              <a:buNone/>
-            </a:pPr>
-            <a:r>
-              <a:rPr lang="en-US" sz="1200" dirty="0">
-                <a:solidFill>
-                  <a:srgbClr val="1A1A1A"/>
-                </a:solidFill>
-                <a:latin typeface="Georgia" pitchFamily="34" charset="0"/>
-                <a:ea typeface="Georgia" pitchFamily="34" charset="-122"/>
-                <a:cs typeface="Georgia" pitchFamily="34" charset="-120"/>
-              </a:rPr>
-              <a:t>, mark a dot every time the running total reaches or exceeds </a:t>
-            </a:r>
-            <a:pPr algn="l" indent="0" marL="0">
-              <a:lnSpc>
-                <a:spcPts val="1680"/>
-              </a:lnSpc>
-              <a:spcBef>
-                <a:spcPts val="300"/>
-              </a:spcBef>
-              <a:spcAft>
-                <a:spcPts val="300"/>
-              </a:spcAft>
-              <a:buNone/>
-            </a:pPr>
-            <a:r>
-              <a:rPr lang="en-US" sz="1200" i="1" dirty="0">
-                <a:solidFill>
-                  <a:srgbClr val="1A1A1A"/>
-                </a:solidFill>
-                <a:latin typeface="Georgia" pitchFamily="34" charset="0"/>
-                <a:ea typeface="Georgia" pitchFamily="34" charset="-122"/>
-                <a:cs typeface="Georgia" pitchFamily="34" charset="-120"/>
-              </a:rPr>
-              <a:t>n</a:t>
-            </a:r>
-            <a:pPr algn="l" indent="0" marL="0">
-              <a:lnSpc>
-                <a:spcPts val="1680"/>
-              </a:lnSpc>
-              <a:spcBef>
-                <a:spcPts val="300"/>
-              </a:spcBef>
-              <a:spcAft>
-                <a:spcPts val="300"/>
-              </a:spcAft>
-              <a:buNone/>
-            </a:pPr>
-            <a:r>
-              <a:rPr lang="en-US" sz="1200" dirty="0">
-                <a:solidFill>
-                  <a:srgbClr val="1A1A1A"/>
-                </a:solidFill>
-                <a:latin typeface="Georgia" pitchFamily="34" charset="0"/>
-                <a:ea typeface="Georgia" pitchFamily="34" charset="-122"/>
-                <a:cs typeface="Georgia" pitchFamily="34" charset="-120"/>
-              </a:rPr>
-              <a:t>. Subtract </a:t>
-            </a:r>
-            <a:pPr algn="l" indent="0" marL="0">
-              <a:lnSpc>
-                <a:spcPts val="1680"/>
-              </a:lnSpc>
-              <a:spcBef>
-                <a:spcPts val="300"/>
-              </a:spcBef>
-              <a:spcAft>
-                <a:spcPts val="300"/>
-              </a:spcAft>
-              <a:buNone/>
-            </a:pPr>
-            <a:r>
-              <a:rPr lang="en-US" sz="1200" i="1" dirty="0">
-                <a:solidFill>
-                  <a:srgbClr val="1A1A1A"/>
-                </a:solidFill>
-                <a:latin typeface="Georgia" pitchFamily="34" charset="0"/>
-                <a:ea typeface="Georgia" pitchFamily="34" charset="-122"/>
-                <a:cs typeface="Georgia" pitchFamily="34" charset="-120"/>
-              </a:rPr>
-              <a:t>n</a:t>
-            </a:r>
-            <a:pPr algn="l" indent="0" marL="0">
-              <a:lnSpc>
-                <a:spcPts val="1680"/>
-              </a:lnSpc>
-              <a:spcBef>
-                <a:spcPts val="300"/>
-              </a:spcBef>
-              <a:spcAft>
-                <a:spcPts val="300"/>
-              </a:spcAft>
-              <a:buNone/>
-            </a:pPr>
-            <a:r>
-              <a:rPr lang="en-US" sz="1200" dirty="0">
-                <a:solidFill>
-                  <a:srgbClr val="1A1A1A"/>
-                </a:solidFill>
-                <a:latin typeface="Georgia" pitchFamily="34" charset="0"/>
-                <a:ea typeface="Georgia" pitchFamily="34" charset="-122"/>
-                <a:cs typeface="Georgia" pitchFamily="34" charset="-120"/>
-              </a:rPr>
-              <a:t> from the running total. Final running total = units. Dot count = "carry to next column."</a:t>
-            </a:r>
-            <a:endParaRPr lang="en-US" sz="1200" dirty="0"/>
-          </a:p>
-        </p:txBody>
-      </p:sp>
-      <p:sp>
-        <p:nvSpPr>
-          <p:cNvPr id="20" name="Text 18"/>
-          <p:cNvSpPr/>
-          <p:nvPr/>
-        </p:nvSpPr>
-        <p:spPr>
-          <a:xfrm>
-            <a:off x="406301" y="5756225"/>
+            <a:off x="406301" y="4434929"/>
             <a:ext cx="8498026" cy="213271"/>
           </a:xfrm>
           <a:prstGeom prst="rect">
@@ -4408,7 +4817,7 @@
                 <a:ea typeface="Times New Roman" pitchFamily="34" charset="-122"/>
                 <a:cs typeface="Times New Roman" pitchFamily="34" charset="-120"/>
               </a:rPr>
-              <a:t>Practice (10 min)</a:t>
+              <a:t>Core (20 min) — Generalisation</a:t>
             </a:r>
             <a:endParaRPr lang="en-US" sz="1800" dirty="0"/>
           </a:p>
@@ -4422,8 +4831,8 @@
         </p:nvSpPr>
         <p:spPr>
           <a:xfrm>
-            <a:off x="406301" y="870942"/>
-            <a:ext cx="8498026" cy="426541"/>
+            <a:off x="634901" y="883593"/>
+            <a:ext cx="8102798" cy="769441"/>
           </a:xfrm>
           <a:prstGeom prst="rect">
             <a:avLst/>
@@ -4435,20 +4844,18 @@
           <a:bodyPr wrap="square" lIns="0" tIns="0" rIns="0" bIns="0" rtlCol="0" anchor="t"/>
           <a:lstStyle/>
           <a:p>
-            <a:pPr algn="l" indent="0" marL="0">
-              <a:lnSpc>
-                <a:spcPts val="1680"/>
-              </a:lnSpc>
-              <a:spcBef>
-                <a:spcPts val="300"/>
-              </a:spcBef>
-              <a:spcAft>
-                <a:spcPts val="300"/>
-              </a:spcAft>
-              <a:buNone/>
-            </a:pPr>
-            <a:r>
-              <a:rPr lang="en-US" sz="1200" dirty="0">
+            <a:pPr algn="l" marL="342900" indent="-342900">
+              <a:lnSpc>
+                <a:spcPts val="1620"/>
+              </a:lnSpc>
+              <a:spcAft>
+                <a:spcPts val="300"/>
+              </a:spcAft>
+              <a:buSzPct val="100000"/>
+              <a:buChar char="•"/>
+            </a:pPr>
+            <a:r>
+              <a:rPr lang="en-US" sz="1200" b="1" dirty="0">
                 <a:solidFill>
                   <a:srgbClr val="1A1A1A"/>
                 </a:solidFill>
@@ -4456,15 +4863,273 @@
                 <a:ea typeface="Georgia" pitchFamily="34" charset="-122"/>
                 <a:cs typeface="Georgia" pitchFamily="34" charset="-120"/>
               </a:rPr>
-              <a:t>3 problems: – Base 8: column of 6 single-digit (in base 8: 0–7) numbers. – Base 16: column of 4 single-digit (0–F) numbers. (Hex.) – Base 10: a real 4×4 multi-column for comparison.</a:t>
+              <a:t>In base 10:</a:t>
+            </a:r>
+            <a:pPr algn="l" indent="0" marL="0">
+              <a:lnSpc>
+                <a:spcPts val="1620"/>
+              </a:lnSpc>
+              <a:spcAft>
+                <a:spcPts val="300"/>
+              </a:spcAft>
+              <a:buNone/>
+            </a:pPr>
+            <a:r>
+              <a:rPr lang="en-US" sz="1200" dirty="0">
+                <a:solidFill>
+                  <a:srgbClr val="1A1A1A"/>
+                </a:solidFill>
+                <a:latin typeface="Georgia" pitchFamily="34" charset="0"/>
+                <a:ea typeface="Georgia" pitchFamily="34" charset="-122"/>
+                <a:cs typeface="Georgia" pitchFamily="34" charset="-120"/>
+              </a:rPr>
+              <a:t> the dot represents "10 used up" → 1 carried.</a:t>
             </a:r>
             <a:endParaRPr lang="en-US" sz="1200" dirty="0"/>
           </a:p>
+          <a:p>
+            <a:pPr algn="l" marL="342900" indent="-342900">
+              <a:lnSpc>
+                <a:spcPts val="1620"/>
+              </a:lnSpc>
+              <a:spcAft>
+                <a:spcPts val="300"/>
+              </a:spcAft>
+              <a:buSzPct val="100000"/>
+              <a:buChar char="•"/>
+            </a:pPr>
+            <a:r>
+              <a:rPr lang="en-US" sz="1200" b="1" dirty="0">
+                <a:solidFill>
+                  <a:srgbClr val="1A1A1A"/>
+                </a:solidFill>
+                <a:latin typeface="Georgia" pitchFamily="34" charset="0"/>
+                <a:ea typeface="Georgia" pitchFamily="34" charset="-122"/>
+                <a:cs typeface="Georgia" pitchFamily="34" charset="-120"/>
+              </a:rPr>
+              <a:t>In base 8:</a:t>
+            </a:r>
+            <a:pPr algn="l" indent="0" marL="0">
+              <a:lnSpc>
+                <a:spcPts val="1620"/>
+              </a:lnSpc>
+              <a:spcAft>
+                <a:spcPts val="300"/>
+              </a:spcAft>
+              <a:buNone/>
+            </a:pPr>
+            <a:r>
+              <a:rPr lang="en-US" sz="1200" dirty="0">
+                <a:solidFill>
+                  <a:srgbClr val="1A1A1A"/>
+                </a:solidFill>
+                <a:latin typeface="Georgia" pitchFamily="34" charset="0"/>
+                <a:ea typeface="Georgia" pitchFamily="34" charset="-122"/>
+                <a:cs typeface="Georgia" pitchFamily="34" charset="-120"/>
+              </a:rPr>
+              <a:t> the dot represents "8 used up" → 1 carried.</a:t>
+            </a:r>
+            <a:endParaRPr lang="en-US" sz="1200" dirty="0"/>
+          </a:p>
+          <a:p>
+            <a:pPr algn="l" marL="342900" indent="-342900">
+              <a:lnSpc>
+                <a:spcPts val="1620"/>
+              </a:lnSpc>
+              <a:spcAft>
+                <a:spcPts val="300"/>
+              </a:spcAft>
+              <a:buSzPct val="100000"/>
+              <a:buChar char="•"/>
+            </a:pPr>
+            <a:r>
+              <a:rPr lang="en-US" sz="1200" b="1" dirty="0">
+                <a:solidFill>
+                  <a:srgbClr val="1A1A1A"/>
+                </a:solidFill>
+                <a:latin typeface="Georgia" pitchFamily="34" charset="0"/>
+                <a:ea typeface="Georgia" pitchFamily="34" charset="-122"/>
+                <a:cs typeface="Georgia" pitchFamily="34" charset="-120"/>
+              </a:rPr>
+              <a:t>In base 16:</a:t>
+            </a:r>
+            <a:pPr algn="l" indent="0" marL="0">
+              <a:lnSpc>
+                <a:spcPts val="1620"/>
+              </a:lnSpc>
+              <a:spcAft>
+                <a:spcPts val="300"/>
+              </a:spcAft>
+              <a:buNone/>
+            </a:pPr>
+            <a:r>
+              <a:rPr lang="en-US" sz="1200" dirty="0">
+                <a:solidFill>
+                  <a:srgbClr val="1A1A1A"/>
+                </a:solidFill>
+                <a:latin typeface="Georgia" pitchFamily="34" charset="0"/>
+                <a:ea typeface="Georgia" pitchFamily="34" charset="-122"/>
+                <a:cs typeface="Georgia" pitchFamily="34" charset="-120"/>
+              </a:rPr>
+              <a:t> the dot represents "16 used up" → 1 carried.</a:t>
+            </a:r>
+            <a:endParaRPr lang="en-US" sz="1200" dirty="0"/>
+          </a:p>
         </p:txBody>
       </p:sp>
       <p:sp>
         <p:nvSpPr>
           <p:cNvPr id="5" name="Text 3"/>
+          <p:cNvSpPr/>
+          <p:nvPr/>
+        </p:nvSpPr>
+        <p:spPr>
+          <a:xfrm>
+            <a:off x="634901" y="1754535"/>
+            <a:ext cx="8102798" cy="525661"/>
+          </a:xfrm>
+          <a:prstGeom prst="rect">
+            <a:avLst/>
+          </a:prstGeom>
+          <a:noFill/>
+          <a:ln/>
+        </p:spPr>
+        <p:txBody>
+          <a:bodyPr wrap="square" lIns="0" tIns="0" rIns="0" bIns="0" rtlCol="0" anchor="t"/>
+          <a:lstStyle/>
+          <a:p>
+            <a:pPr algn="l" marL="342900" indent="-342900">
+              <a:lnSpc>
+                <a:spcPts val="1620"/>
+              </a:lnSpc>
+              <a:spcAft>
+                <a:spcPts val="300"/>
+              </a:spcAft>
+              <a:buSzPct val="100000"/>
+              <a:buChar char="•"/>
+            </a:pPr>
+            <a:r>
+              <a:rPr lang="en-US" sz="1200" b="1" dirty="0">
+                <a:solidFill>
+                  <a:srgbClr val="1A1A1A"/>
+                </a:solidFill>
+                <a:latin typeface="Georgia" pitchFamily="34" charset="0"/>
+                <a:ea typeface="Georgia" pitchFamily="34" charset="-122"/>
+                <a:cs typeface="Georgia" pitchFamily="34" charset="-120"/>
+              </a:rPr>
+              <a:t>What changes:</a:t>
+            </a:r>
+            <a:pPr algn="l" indent="0" marL="0">
+              <a:lnSpc>
+                <a:spcPts val="1620"/>
+              </a:lnSpc>
+              <a:spcAft>
+                <a:spcPts val="300"/>
+              </a:spcAft>
+              <a:buNone/>
+            </a:pPr>
+            <a:r>
+              <a:rPr lang="en-US" sz="1200" dirty="0">
+                <a:solidFill>
+                  <a:srgbClr val="1A1A1A"/>
+                </a:solidFill>
+                <a:latin typeface="Georgia" pitchFamily="34" charset="0"/>
+                <a:ea typeface="Georgia" pitchFamily="34" charset="-122"/>
+                <a:cs typeface="Georgia" pitchFamily="34" charset="-120"/>
+              </a:rPr>
+              <a:t> the </a:t>
+            </a:r>
+            <a:pPr algn="l" indent="0" marL="0">
+              <a:lnSpc>
+                <a:spcPts val="1620"/>
+              </a:lnSpc>
+              <a:spcAft>
+                <a:spcPts val="300"/>
+              </a:spcAft>
+              <a:buNone/>
+            </a:pPr>
+            <a:r>
+              <a:rPr lang="en-US" sz="1200" i="1" dirty="0">
+                <a:solidFill>
+                  <a:srgbClr val="1A1A1A"/>
+                </a:solidFill>
+                <a:latin typeface="Georgia" pitchFamily="34" charset="0"/>
+                <a:ea typeface="Georgia" pitchFamily="34" charset="-122"/>
+                <a:cs typeface="Georgia" pitchFamily="34" charset="-120"/>
+              </a:rPr>
+              <a:t>target sum</a:t>
+            </a:r>
+            <a:pPr algn="l" indent="0" marL="0">
+              <a:lnSpc>
+                <a:spcPts val="1620"/>
+              </a:lnSpc>
+              <a:spcAft>
+                <a:spcPts val="300"/>
+              </a:spcAft>
+              <a:buNone/>
+            </a:pPr>
+            <a:r>
+              <a:rPr lang="en-US" sz="1200" dirty="0">
+                <a:solidFill>
+                  <a:srgbClr val="1A1A1A"/>
+                </a:solidFill>
+                <a:latin typeface="Georgia" pitchFamily="34" charset="0"/>
+                <a:ea typeface="Georgia" pitchFamily="34" charset="-122"/>
+                <a:cs typeface="Georgia" pitchFamily="34" charset="-120"/>
+              </a:rPr>
+              <a:t> (8 or 16 instead of 10).</a:t>
+            </a:r>
+            <a:endParaRPr lang="en-US" sz="1200" dirty="0"/>
+          </a:p>
+          <a:p>
+            <a:pPr algn="l" marL="342900" indent="-342900">
+              <a:lnSpc>
+                <a:spcPts val="1620"/>
+              </a:lnSpc>
+              <a:spcAft>
+                <a:spcPts val="300"/>
+              </a:spcAft>
+              <a:buSzPct val="100000"/>
+              <a:buChar char="•"/>
+            </a:pPr>
+            <a:r>
+              <a:rPr lang="en-US" sz="1200" b="1" dirty="0">
+                <a:solidFill>
+                  <a:srgbClr val="1A1A1A"/>
+                </a:solidFill>
+                <a:latin typeface="Georgia" pitchFamily="34" charset="0"/>
+                <a:ea typeface="Georgia" pitchFamily="34" charset="-122"/>
+                <a:cs typeface="Georgia" pitchFamily="34" charset="-120"/>
+              </a:rPr>
+              <a:t>What stays the same:</a:t>
+            </a:r>
+            <a:pPr algn="l" indent="0" marL="0">
+              <a:lnSpc>
+                <a:spcPts val="1620"/>
+              </a:lnSpc>
+              <a:spcAft>
+                <a:spcPts val="300"/>
+              </a:spcAft>
+              <a:buNone/>
+            </a:pPr>
+            <a:r>
+              <a:rPr lang="en-US" sz="1200" dirty="0">
+                <a:solidFill>
+                  <a:srgbClr val="1A1A1A"/>
+                </a:solidFill>
+                <a:latin typeface="Georgia" pitchFamily="34" charset="0"/>
+                <a:ea typeface="Georgia" pitchFamily="34" charset="-122"/>
+                <a:cs typeface="Georgia" pitchFamily="34" charset="-120"/>
+              </a:rPr>
+              <a:t> scan procedure; dot count = carry; units = leftover.</a:t>
+            </a:r>
+            <a:endParaRPr lang="en-US" sz="1200" dirty="0"/>
+          </a:p>
+        </p:txBody>
+      </p:sp>
+      <p:sp>
+        <p:nvSpPr>
+          <p:cNvPr id="6" name="Text 4"/>
           <p:cNvSpPr/>
           <p:nvPr/>
         </p:nvSpPr>
@@ -4614,7 +5279,7 @@
                 <a:ea typeface="Times New Roman" pitchFamily="34" charset="-122"/>
                 <a:cs typeface="Times New Roman" pitchFamily="34" charset="-120"/>
               </a:rPr>
-              <a:t>Formative quiz Part B (8 min)</a:t>
+              <a:t>Core (20 min) — Generalisation (cont.)</a:t>
             </a:r>
             <a:endParaRPr lang="en-US" sz="1800" dirty="0"/>
           </a:p>
@@ -4628,8 +5293,8 @@
         </p:nvSpPr>
         <p:spPr>
           <a:xfrm>
-            <a:off x="406301" y="870942"/>
-            <a:ext cx="8498026" cy="213271"/>
+            <a:off x="634901" y="883593"/>
+            <a:ext cx="8102798" cy="281880"/>
           </a:xfrm>
           <a:prstGeom prst="rect">
             <a:avLst/>
@@ -4641,20 +5306,18 @@
           <a:bodyPr wrap="square" lIns="0" tIns="0" rIns="0" bIns="0" rtlCol="0" anchor="t"/>
           <a:lstStyle/>
           <a:p>
-            <a:pPr algn="l" indent="0" marL="0">
-              <a:lnSpc>
-                <a:spcPts val="1680"/>
-              </a:lnSpc>
-              <a:spcBef>
-                <a:spcPts val="300"/>
-              </a:spcBef>
-              <a:spcAft>
-                <a:spcPts val="300"/>
-              </a:spcAft>
-              <a:buNone/>
-            </a:pPr>
-            <a:r>
-              <a:rPr lang="en-US" sz="1200" dirty="0">
+            <a:pPr algn="l" marL="342900" indent="-342900">
+              <a:lnSpc>
+                <a:spcPts val="1620"/>
+              </a:lnSpc>
+              <a:spcAft>
+                <a:spcPts val="300"/>
+              </a:spcAft>
+              <a:buSzPct val="100000"/>
+              <a:buChar char="•"/>
+            </a:pPr>
+            <a:r>
+              <a:rPr lang="en-US" sz="1200" b="1" dirty="0">
                 <a:solidFill>
                   <a:srgbClr val="1A1A1A"/>
                 </a:solidFill>
@@ -4662,53 +5325,7 @@
                 <a:ea typeface="Georgia" pitchFamily="34" charset="-122"/>
                 <a:cs typeface="Georgia" pitchFamily="34" charset="-120"/>
               </a:rPr>
-              <a:t>– 5 questions: mostly base-conversion and base-</a:t>
-            </a:r>
-            <a:pPr algn="l" indent="0" marL="0">
-              <a:lnSpc>
-                <a:spcPts val="1680"/>
-              </a:lnSpc>
-              <a:spcBef>
-                <a:spcPts val="300"/>
-              </a:spcBef>
-              <a:spcAft>
-                <a:spcPts val="300"/>
-              </a:spcAft>
-              <a:buNone/>
-            </a:pPr>
-            <a:r>
-              <a:rPr lang="en-US" sz="1200" i="1" dirty="0">
-                <a:solidFill>
-                  <a:srgbClr val="1A1A1A"/>
-                </a:solidFill>
-                <a:latin typeface="Georgia" pitchFamily="34" charset="0"/>
-                <a:ea typeface="Georgia" pitchFamily="34" charset="-122"/>
-                <a:cs typeface="Georgia" pitchFamily="34" charset="-120"/>
-              </a:rPr>
-              <a:t>n</a:t>
-            </a:r>
-            <a:pPr algn="l" indent="0" marL="0">
-              <a:lnSpc>
-                <a:spcPts val="1680"/>
-              </a:lnSpc>
-              <a:spcBef>
-                <a:spcPts val="300"/>
-              </a:spcBef>
-              <a:spcAft>
-                <a:spcPts val="300"/>
-              </a:spcAft>
-              <a:buNone/>
-            </a:pPr>
-            <a:r>
-              <a:rPr lang="en-US" sz="1200" dirty="0">
-                <a:solidFill>
-                  <a:srgbClr val="1A1A1A"/>
-                </a:solidFill>
-                <a:latin typeface="Georgia" pitchFamily="34" charset="0"/>
-                <a:ea typeface="Georgia" pitchFamily="34" charset="-122"/>
-                <a:cs typeface="Georgia" pitchFamily="34" charset="-120"/>
-              </a:rPr>
-              <a:t> dot method.</a:t>
+              <a:t>Worked example in base 8:</a:t>
             </a:r>
             <a:endParaRPr lang="en-US" sz="1200" dirty="0"/>
           </a:p>
@@ -4866,7 +5483,7 @@
                 <a:ea typeface="Times New Roman" pitchFamily="34" charset="-122"/>
                 <a:cs typeface="Times New Roman" pitchFamily="34" charset="-120"/>
               </a:rPr>
-              <a:t>Wrap-up (2 min)</a:t>
+              <a:t>Core (20 min) — Generalisation (cont.)</a:t>
             </a:r>
             <a:endParaRPr lang="en-US" sz="1800" dirty="0"/>
           </a:p>
@@ -4880,13 +5497,66 @@
         </p:nvSpPr>
         <p:spPr>
           <a:xfrm>
-            <a:off x="406301" y="870942"/>
-            <a:ext cx="8498026" cy="213271"/>
-          </a:xfrm>
-          <a:prstGeom prst="rect">
+            <a:off x="406301" y="883593"/>
+            <a:ext cx="8331398" cy="1650504"/>
+          </a:xfrm>
+          <a:prstGeom prst="rect">
+            <a:avLst/>
+          </a:prstGeom>
+          <a:solidFill>
+            <a:srgbClr val="FFFFFF"/>
+          </a:solidFill>
+          <a:ln/>
+        </p:spPr>
+        <p:txBody>
+          <a:bodyPr wrap="square" rtlCol="0" anchor="ctr"/>
+          <a:lstStyle/>
+          <a:p>
+            <a:pPr indent="0" marL="0">
+              <a:buNone/>
+            </a:pPr>
+            <a:endParaRPr lang="en-US" dirty="0"/>
+          </a:p>
+        </p:txBody>
+      </p:sp>
+      <p:sp>
+        <p:nvSpPr>
+          <p:cNvPr id="5" name="Shape 3"/>
+          <p:cNvSpPr/>
+          <p:nvPr/>
+        </p:nvSpPr>
+        <p:spPr>
+          <a:xfrm>
+            <a:off x="430113" y="883593"/>
+            <a:ext cx="0" cy="1650504"/>
+          </a:xfrm>
+          <a:prstGeom prst="line">
             <a:avLst/>
           </a:prstGeom>
           <a:noFill/>
+          <a:ln w="47625">
+            <a:solidFill>
+              <a:srgbClr val="5D1D2E"/>
+            </a:solidFill>
+            <a:prstDash val="solid"/>
+          </a:ln>
+        </p:spPr>
+      </p:sp>
+      <p:sp>
+        <p:nvSpPr>
+          <p:cNvPr id="6" name="Text 4"/>
+          <p:cNvSpPr/>
+          <p:nvPr/>
+        </p:nvSpPr>
+        <p:spPr>
+          <a:xfrm>
+            <a:off x="631627" y="1010543"/>
+            <a:ext cx="8086939" cy="174575"/>
+          </a:xfrm>
+          <a:prstGeom prst="rect">
+            <a:avLst/>
+          </a:prstGeom>
+          <a:noFill/>
           <a:ln/>
         </p:spPr>
         <p:txBody>
@@ -4895,57 +5565,322 @@
           <a:p>
             <a:pPr algn="l" indent="0" marL="0">
               <a:lnSpc>
-                <a:spcPts val="1680"/>
-              </a:lnSpc>
-              <a:spcBef>
-                <a:spcPts val="300"/>
-              </a:spcBef>
-              <a:spcAft>
-                <a:spcPts val="300"/>
-              </a:spcAft>
-              <a:buNone/>
-            </a:pPr>
-            <a:r>
-              <a:rPr lang="en-US" sz="1200" dirty="0">
-                <a:solidFill>
-                  <a:srgbClr val="1A1A1A"/>
-                </a:solidFill>
-                <a:latin typeface="Georgia" pitchFamily="34" charset="0"/>
-                <a:ea typeface="Georgia" pitchFamily="34" charset="-122"/>
-                <a:cs typeface="Georgia" pitchFamily="34" charset="-120"/>
-              </a:rPr>
-              <a:t>– Preview Day 6: </a:t>
-            </a:r>
+                <a:spcPts val="1375"/>
+              </a:lnSpc>
+              <a:buNone/>
+            </a:pPr>
+            <a:r>
+              <a:rPr lang="en-US" sz="1100" dirty="0">
+                <a:solidFill>
+                  <a:srgbClr val="1A1A1A"/>
+                </a:solidFill>
+                <a:latin typeface="Courier New" pitchFamily="34" charset="0"/>
+                <a:ea typeface="Courier New" pitchFamily="34" charset="-122"/>
+                <a:cs typeface="Courier New" pitchFamily="34" charset="-120"/>
+              </a:rPr>
+              <a:t>Column (base 8): 4, 7, 3, 6, 5</a:t>
+            </a:r>
+            <a:endParaRPr lang="en-US" sz="1100" dirty="0"/>
+          </a:p>
+        </p:txBody>
+      </p:sp>
+      <p:sp>
+        <p:nvSpPr>
+          <p:cNvPr id="7" name="Text 5"/>
+          <p:cNvSpPr/>
+          <p:nvPr/>
+        </p:nvSpPr>
+        <p:spPr>
+          <a:xfrm>
+            <a:off x="631627" y="1185118"/>
+            <a:ext cx="8086939" cy="174575"/>
+          </a:xfrm>
+          <a:prstGeom prst="rect">
+            <a:avLst/>
+          </a:prstGeom>
+          <a:noFill/>
+          <a:ln/>
+        </p:spPr>
+        <p:txBody>
+          <a:bodyPr wrap="square" lIns="0" tIns="0" rIns="0" bIns="0" rtlCol="0" anchor="t"/>
+          <a:lstStyle/>
+          <a:p>
             <a:pPr algn="l" indent="0" marL="0">
               <a:lnSpc>
-                <a:spcPts val="1680"/>
-              </a:lnSpc>
-              <a:spcBef>
-                <a:spcPts val="300"/>
-              </a:spcBef>
-              <a:spcAft>
-                <a:spcPts val="300"/>
-              </a:spcAft>
-              <a:buNone/>
-            </a:pPr>
-            <a:r>
-              <a:rPr lang="en-US" sz="1200" i="1" dirty="0">
-                <a:solidFill>
-                  <a:srgbClr val="1A1A1A"/>
-                </a:solidFill>
-                <a:latin typeface="Georgia" pitchFamily="34" charset="0"/>
-                <a:ea typeface="Georgia" pitchFamily="34" charset="-122"/>
-                <a:cs typeface="Georgia" pitchFamily="34" charset="-120"/>
-              </a:rPr>
-              <a:t>"Tomorrow — the historicity question. Was 'Vedic mathematics' actually Vedic?"</a:t>
-            </a:r>
-            <a:endParaRPr lang="en-US" sz="1200" dirty="0"/>
-          </a:p>
-        </p:txBody>
-      </p:sp>
-      <p:sp>
-        <p:nvSpPr>
-          <p:cNvPr id="5" name="Text 3"/>
+                <a:spcPts val="1375"/>
+              </a:lnSpc>
+              <a:buNone/>
+            </a:pPr>
+            <a:r>
+              <a:rPr lang="en-US" sz="1100" dirty="0">
+                <a:solidFill>
+                  <a:srgbClr val="1A1A1A"/>
+                </a:solidFill>
+                <a:latin typeface="Courier New" pitchFamily="34" charset="0"/>
+                <a:ea typeface="Courier New" pitchFamily="34" charset="-122"/>
+                <a:cs typeface="Courier New" pitchFamily="34" charset="-120"/>
+              </a:rPr>
+              <a:t>– Start total: 0</a:t>
+            </a:r>
+            <a:endParaRPr lang="en-US" sz="1100" dirty="0"/>
+          </a:p>
+        </p:txBody>
+      </p:sp>
+      <p:sp>
+        <p:nvSpPr>
+          <p:cNvPr id="8" name="Text 6"/>
+          <p:cNvSpPr/>
+          <p:nvPr/>
+        </p:nvSpPr>
+        <p:spPr>
+          <a:xfrm>
+            <a:off x="631627" y="1359694"/>
+            <a:ext cx="8086939" cy="174575"/>
+          </a:xfrm>
+          <a:prstGeom prst="rect">
+            <a:avLst/>
+          </a:prstGeom>
+          <a:noFill/>
+          <a:ln/>
+        </p:spPr>
+        <p:txBody>
+          <a:bodyPr wrap="square" lIns="0" tIns="0" rIns="0" bIns="0" rtlCol="0" anchor="t"/>
+          <a:lstStyle/>
+          <a:p>
+            <a:pPr algn="l" indent="0" marL="0">
+              <a:lnSpc>
+                <a:spcPts val="1375"/>
+              </a:lnSpc>
+              <a:buNone/>
+            </a:pPr>
+            <a:r>
+              <a:rPr lang="en-US" sz="1100" dirty="0">
+                <a:solidFill>
+                  <a:srgbClr val="1A1A1A"/>
+                </a:solidFill>
+                <a:latin typeface="Courier New" pitchFamily="34" charset="0"/>
+                <a:ea typeface="Courier New" pitchFamily="34" charset="-122"/>
+                <a:cs typeface="Courier New" pitchFamily="34" charset="-120"/>
+              </a:rPr>
+              <a:t>– +4 → 4</a:t>
+            </a:r>
+            <a:endParaRPr lang="en-US" sz="1100" dirty="0"/>
+          </a:p>
+        </p:txBody>
+      </p:sp>
+      <p:sp>
+        <p:nvSpPr>
+          <p:cNvPr id="9" name="Text 7"/>
+          <p:cNvSpPr/>
+          <p:nvPr/>
+        </p:nvSpPr>
+        <p:spPr>
+          <a:xfrm>
+            <a:off x="631627" y="1534269"/>
+            <a:ext cx="8086939" cy="174575"/>
+          </a:xfrm>
+          <a:prstGeom prst="rect">
+            <a:avLst/>
+          </a:prstGeom>
+          <a:noFill/>
+          <a:ln/>
+        </p:spPr>
+        <p:txBody>
+          <a:bodyPr wrap="square" lIns="0" tIns="0" rIns="0" bIns="0" rtlCol="0" anchor="t"/>
+          <a:lstStyle/>
+          <a:p>
+            <a:pPr algn="l" indent="0" marL="0">
+              <a:lnSpc>
+                <a:spcPts val="1375"/>
+              </a:lnSpc>
+              <a:buNone/>
+            </a:pPr>
+            <a:r>
+              <a:rPr lang="en-US" sz="1100" dirty="0">
+                <a:solidFill>
+                  <a:srgbClr val="1A1A1A"/>
+                </a:solidFill>
+                <a:latin typeface="Courier New" pitchFamily="34" charset="0"/>
+                <a:ea typeface="Courier New" pitchFamily="34" charset="-122"/>
+                <a:cs typeface="Courier New" pitchFamily="34" charset="-120"/>
+              </a:rPr>
+              <a:t>– +7 → 11_(10) = 13_(8). Wait — in base 8, 8 is "10". So 4+7 = 11_(10), which is 1 "8" + 3, so DOT on 7, total = 3.</a:t>
+            </a:r>
+            <a:endParaRPr lang="en-US" sz="1100" dirty="0"/>
+          </a:p>
+        </p:txBody>
+      </p:sp>
+      <p:sp>
+        <p:nvSpPr>
+          <p:cNvPr id="10" name="Text 8"/>
+          <p:cNvSpPr/>
+          <p:nvPr/>
+        </p:nvSpPr>
+        <p:spPr>
+          <a:xfrm>
+            <a:off x="631627" y="1708845"/>
+            <a:ext cx="8086939" cy="174575"/>
+          </a:xfrm>
+          <a:prstGeom prst="rect">
+            <a:avLst/>
+          </a:prstGeom>
+          <a:noFill/>
+          <a:ln/>
+        </p:spPr>
+        <p:txBody>
+          <a:bodyPr wrap="square" lIns="0" tIns="0" rIns="0" bIns="0" rtlCol="0" anchor="t"/>
+          <a:lstStyle/>
+          <a:p>
+            <a:pPr algn="l" indent="0" marL="0">
+              <a:lnSpc>
+                <a:spcPts val="1375"/>
+              </a:lnSpc>
+              <a:buNone/>
+            </a:pPr>
+            <a:r>
+              <a:rPr lang="en-US" sz="1100" dirty="0">
+                <a:solidFill>
+                  <a:srgbClr val="1A1A1A"/>
+                </a:solidFill>
+                <a:latin typeface="Courier New" pitchFamily="34" charset="0"/>
+                <a:ea typeface="Courier New" pitchFamily="34" charset="-122"/>
+                <a:cs typeface="Courier New" pitchFamily="34" charset="-120"/>
+              </a:rPr>
+              <a:t>– +3 → 6</a:t>
+            </a:r>
+            <a:endParaRPr lang="en-US" sz="1100" dirty="0"/>
+          </a:p>
+        </p:txBody>
+      </p:sp>
+      <p:sp>
+        <p:nvSpPr>
+          <p:cNvPr id="11" name="Text 9"/>
+          <p:cNvSpPr/>
+          <p:nvPr/>
+        </p:nvSpPr>
+        <p:spPr>
+          <a:xfrm>
+            <a:off x="631627" y="1883420"/>
+            <a:ext cx="8086939" cy="174575"/>
+          </a:xfrm>
+          <a:prstGeom prst="rect">
+            <a:avLst/>
+          </a:prstGeom>
+          <a:noFill/>
+          <a:ln/>
+        </p:spPr>
+        <p:txBody>
+          <a:bodyPr wrap="square" lIns="0" tIns="0" rIns="0" bIns="0" rtlCol="0" anchor="t"/>
+          <a:lstStyle/>
+          <a:p>
+            <a:pPr algn="l" indent="0" marL="0">
+              <a:lnSpc>
+                <a:spcPts val="1375"/>
+              </a:lnSpc>
+              <a:buNone/>
+            </a:pPr>
+            <a:r>
+              <a:rPr lang="en-US" sz="1100" dirty="0">
+                <a:solidFill>
+                  <a:srgbClr val="1A1A1A"/>
+                </a:solidFill>
+                <a:latin typeface="Courier New" pitchFamily="34" charset="0"/>
+                <a:ea typeface="Courier New" pitchFamily="34" charset="-122"/>
+                <a:cs typeface="Courier New" pitchFamily="34" charset="-120"/>
+              </a:rPr>
+              <a:t>– +6 → 12_(10) = 14_(8). That's 1 "8" + 4. DOT on 6, total = 4.</a:t>
+            </a:r>
+            <a:endParaRPr lang="en-US" sz="1100" dirty="0"/>
+          </a:p>
+        </p:txBody>
+      </p:sp>
+      <p:sp>
+        <p:nvSpPr>
+          <p:cNvPr id="12" name="Text 10"/>
+          <p:cNvSpPr/>
+          <p:nvPr/>
+        </p:nvSpPr>
+        <p:spPr>
+          <a:xfrm>
+            <a:off x="631627" y="2057995"/>
+            <a:ext cx="8086939" cy="174575"/>
+          </a:xfrm>
+          <a:prstGeom prst="rect">
+            <a:avLst/>
+          </a:prstGeom>
+          <a:noFill/>
+          <a:ln/>
+        </p:spPr>
+        <p:txBody>
+          <a:bodyPr wrap="square" lIns="0" tIns="0" rIns="0" bIns="0" rtlCol="0" anchor="t"/>
+          <a:lstStyle/>
+          <a:p>
+            <a:pPr algn="l" indent="0" marL="0">
+              <a:lnSpc>
+                <a:spcPts val="1375"/>
+              </a:lnSpc>
+              <a:buNone/>
+            </a:pPr>
+            <a:r>
+              <a:rPr lang="en-US" sz="1100" dirty="0">
+                <a:solidFill>
+                  <a:srgbClr val="1A1A1A"/>
+                </a:solidFill>
+                <a:latin typeface="Courier New" pitchFamily="34" charset="0"/>
+                <a:ea typeface="Courier New" pitchFamily="34" charset="-122"/>
+                <a:cs typeface="Courier New" pitchFamily="34" charset="-120"/>
+              </a:rPr>
+              <a:t>– +5 → 9_(10) = 11_(8). That's 1 "8" + 1. DOT on 5, total = 1.</a:t>
+            </a:r>
+            <a:endParaRPr lang="en-US" sz="1100" dirty="0"/>
+          </a:p>
+        </p:txBody>
+      </p:sp>
+      <p:sp>
+        <p:nvSpPr>
+          <p:cNvPr id="13" name="Text 11"/>
+          <p:cNvSpPr/>
+          <p:nvPr/>
+        </p:nvSpPr>
+        <p:spPr>
+          <a:xfrm>
+            <a:off x="631627" y="2232571"/>
+            <a:ext cx="8086939" cy="174575"/>
+          </a:xfrm>
+          <a:prstGeom prst="rect">
+            <a:avLst/>
+          </a:prstGeom>
+          <a:noFill/>
+          <a:ln/>
+        </p:spPr>
+        <p:txBody>
+          <a:bodyPr wrap="square" lIns="0" tIns="0" rIns="0" bIns="0" rtlCol="0" anchor="t"/>
+          <a:lstStyle/>
+          <a:p>
+            <a:pPr algn="l" indent="0" marL="0">
+              <a:lnSpc>
+                <a:spcPts val="1375"/>
+              </a:lnSpc>
+              <a:buNone/>
+            </a:pPr>
+            <a:r>
+              <a:rPr lang="en-US" sz="1100" dirty="0">
+                <a:solidFill>
+                  <a:srgbClr val="1A1A1A"/>
+                </a:solidFill>
+                <a:latin typeface="Courier New" pitchFamily="34" charset="0"/>
+                <a:ea typeface="Courier New" pitchFamily="34" charset="-122"/>
+                <a:cs typeface="Courier New" pitchFamily="34" charset="-120"/>
+              </a:rPr>
+              <a:t>– Final units (base 8): 1. Carries: 3.</a:t>
+            </a:r>
+            <a:endParaRPr lang="en-US" sz="1100" dirty="0"/>
+          </a:p>
+        </p:txBody>
+      </p:sp>
+      <p:sp>
+        <p:nvSpPr>
+          <p:cNvPr id="14" name="Text 12"/>
           <p:cNvSpPr/>
           <p:nvPr/>
         </p:nvSpPr>
@@ -5095,7 +6030,7 @@
                 <a:ea typeface="Times New Roman" pitchFamily="34" charset="-122"/>
                 <a:cs typeface="Times New Roman" pitchFamily="34" charset="-120"/>
               </a:rPr>
-              <a:t>Differentiation</a:t>
+              <a:t>Core (20 min) — Generalisation (cont.)</a:t>
             </a:r>
             <a:endParaRPr lang="en-US" sz="1800" dirty="0"/>
           </a:p>
@@ -5109,8 +6044,8 @@
         </p:nvSpPr>
         <p:spPr>
           <a:xfrm>
-            <a:off x="634901" y="883593"/>
-            <a:ext cx="8102798" cy="525661"/>
+            <a:off x="406301" y="870942"/>
+            <a:ext cx="8498026" cy="213271"/>
           </a:xfrm>
           <a:prstGeom prst="rect">
             <a:avLst/>
@@ -5122,18 +6057,20 @@
           <a:bodyPr wrap="square" lIns="0" tIns="0" rIns="0" bIns="0" rtlCol="0" anchor="t"/>
           <a:lstStyle/>
           <a:p>
-            <a:pPr algn="l" marL="342900" indent="-342900">
-              <a:lnSpc>
-                <a:spcPts val="1620"/>
-              </a:lnSpc>
-              <a:spcAft>
-                <a:spcPts val="300"/>
-              </a:spcAft>
-              <a:buSzPct val="100000"/>
-              <a:buChar char="•"/>
-            </a:pPr>
-            <a:r>
-              <a:rPr lang="en-US" sz="1200" b="1" dirty="0">
+            <a:pPr algn="l" indent="0" marL="0">
+              <a:lnSpc>
+                <a:spcPts val="1680"/>
+              </a:lnSpc>
+              <a:spcBef>
+                <a:spcPts val="300"/>
+              </a:spcBef>
+              <a:spcAft>
+                <a:spcPts val="300"/>
+              </a:spcAft>
+              <a:buNone/>
+            </a:pPr>
+            <a:r>
+              <a:rPr lang="en-US" sz="1200" dirty="0">
                 <a:solidFill>
                   <a:srgbClr val="1A1A1A"/>
                 </a:solidFill>
@@ -5141,19 +6078,45 @@
                 <a:ea typeface="Georgia" pitchFamily="34" charset="-122"/>
                 <a:cs typeface="Georgia" pitchFamily="34" charset="-120"/>
               </a:rPr>
-              <a:t>Tier up:</a:t>
-            </a:r>
-            <a:pPr algn="l" indent="0" marL="0">
+              <a:t>Check: 4+7+3+6+5 = 25_(10) = 31_(8). Units = 1, "tens" (i.e. 8s) = 3. ✓</a:t>
+            </a:r>
+            <a:endParaRPr lang="en-US" sz="1200" dirty="0"/>
+          </a:p>
+        </p:txBody>
+      </p:sp>
+      <p:sp>
+        <p:nvSpPr>
+          <p:cNvPr id="5" name="Text 3"/>
+          <p:cNvSpPr/>
+          <p:nvPr/>
+        </p:nvSpPr>
+        <p:spPr>
+          <a:xfrm>
+            <a:off x="634901" y="1173063"/>
+            <a:ext cx="8102798" cy="281880"/>
+          </a:xfrm>
+          <a:prstGeom prst="rect">
+            <a:avLst/>
+          </a:prstGeom>
+          <a:noFill/>
+          <a:ln/>
+        </p:spPr>
+        <p:txBody>
+          <a:bodyPr wrap="square" lIns="0" tIns="0" rIns="0" bIns="0" rtlCol="0" anchor="t"/>
+          <a:lstStyle/>
+          <a:p>
+            <a:pPr algn="l" marL="342900" indent="-342900">
               <a:lnSpc>
                 <a:spcPts val="1620"/>
               </a:lnSpc>
               <a:spcAft>
                 <a:spcPts val="300"/>
               </a:spcAft>
-              <a:buNone/>
-            </a:pPr>
-            <a:r>
-              <a:rPr lang="en-US" sz="1200" dirty="0">
+              <a:buSzPct val="100000"/>
+              <a:buChar char="•"/>
+            </a:pPr>
+            <a:r>
+              <a:rPr lang="en-US" sz="1200" b="1" dirty="0">
                 <a:solidFill>
                   <a:srgbClr val="1A1A1A"/>
                 </a:solidFill>
@@ -5161,59 +6124,254 @@
                 <a:ea typeface="Georgia" pitchFamily="34" charset="-122"/>
                 <a:cs typeface="Georgia" pitchFamily="34" charset="-120"/>
               </a:rPr>
-              <a:t> Base 2 (binary) dot method. (Trivial: every column entry is 0 or 1; the dot marks whenever you have 2 ones.)</a:t>
+              <a:t>The general rule:</a:t>
             </a:r>
             <a:endParaRPr lang="en-US" sz="1200" dirty="0"/>
           </a:p>
-          <a:p>
-            <a:pPr algn="l" marL="342900" indent="-342900">
-              <a:lnSpc>
-                <a:spcPts val="1620"/>
-              </a:lnSpc>
-              <a:spcAft>
-                <a:spcPts val="300"/>
-              </a:spcAft>
-              <a:buSzPct val="100000"/>
-              <a:buChar char="•"/>
-            </a:pPr>
-            <a:r>
-              <a:rPr lang="en-US" sz="1200" b="1" dirty="0">
-                <a:solidFill>
-                  <a:srgbClr val="1A1A1A"/>
-                </a:solidFill>
-                <a:latin typeface="Georgia" pitchFamily="34" charset="0"/>
-                <a:ea typeface="Georgia" pitchFamily="34" charset="-122"/>
-                <a:cs typeface="Georgia" pitchFamily="34" charset="-120"/>
-              </a:rPr>
-              <a:t>Tier down:</a:t>
-            </a:r>
+        </p:txBody>
+      </p:sp>
+      <p:sp>
+        <p:nvSpPr>
+          <p:cNvPr id="6" name="Text 4"/>
+          <p:cNvSpPr/>
+          <p:nvPr/>
+        </p:nvSpPr>
+        <p:spPr>
+          <a:xfrm>
+            <a:off x="406301" y="1556445"/>
+            <a:ext cx="8331398" cy="842963"/>
+          </a:xfrm>
+          <a:prstGeom prst="rect">
+            <a:avLst/>
+          </a:prstGeom>
+          <a:solidFill>
+            <a:srgbClr val="FFFFFF"/>
+          </a:solidFill>
+          <a:ln/>
+        </p:spPr>
+        <p:txBody>
+          <a:bodyPr wrap="square" rtlCol="0" anchor="ctr"/>
+          <a:lstStyle/>
+          <a:p>
+            <a:pPr indent="0" marL="0">
+              <a:buNone/>
+            </a:pPr>
+            <a:endParaRPr lang="en-US" dirty="0"/>
+          </a:p>
+        </p:txBody>
+      </p:sp>
+      <p:sp>
+        <p:nvSpPr>
+          <p:cNvPr id="7" name="Shape 5"/>
+          <p:cNvSpPr/>
+          <p:nvPr/>
+        </p:nvSpPr>
+        <p:spPr>
+          <a:xfrm>
+            <a:off x="434876" y="1556445"/>
+            <a:ext cx="0" cy="842963"/>
+          </a:xfrm>
+          <a:prstGeom prst="line">
+            <a:avLst/>
+          </a:prstGeom>
+          <a:noFill/>
+          <a:ln w="57150">
+            <a:solidFill>
+              <a:srgbClr val="997929"/>
+            </a:solidFill>
+            <a:prstDash val="solid"/>
+          </a:ln>
+        </p:spPr>
+      </p:sp>
+      <p:sp>
+        <p:nvSpPr>
+          <p:cNvPr id="8" name="Text 6"/>
+          <p:cNvSpPr/>
+          <p:nvPr/>
+        </p:nvSpPr>
+        <p:spPr>
+          <a:xfrm>
+            <a:off x="692051" y="1746945"/>
+            <a:ext cx="7973389" cy="461963"/>
+          </a:xfrm>
+          <a:prstGeom prst="rect">
+            <a:avLst/>
+          </a:prstGeom>
+          <a:noFill/>
+          <a:ln/>
+        </p:spPr>
+        <p:txBody>
+          <a:bodyPr wrap="square" lIns="0" tIns="0" rIns="0" bIns="0" rtlCol="0" anchor="t"/>
+          <a:lstStyle/>
+          <a:p>
             <a:pPr algn="l" indent="0" marL="0">
               <a:lnSpc>
-                <a:spcPts val="1620"/>
-              </a:lnSpc>
-              <a:spcAft>
-                <a:spcPts val="300"/>
-              </a:spcAft>
-              <a:buNone/>
-            </a:pPr>
-            <a:r>
-              <a:rPr lang="en-US" sz="1200" dirty="0">
-                <a:solidFill>
-                  <a:srgbClr val="1A1A1A"/>
-                </a:solidFill>
-                <a:latin typeface="Georgia" pitchFamily="34" charset="0"/>
-                <a:ea typeface="Georgia" pitchFamily="34" charset="-122"/>
-                <a:cs typeface="Georgia" pitchFamily="34" charset="-120"/>
-              </a:rPr>
-              <a:t> Stay in base 10; review the procedure.</a:t>
-            </a:r>
-            <a:endParaRPr lang="en-US" sz="1200" dirty="0"/>
-          </a:p>
-        </p:txBody>
-      </p:sp>
-      <p:sp>
-        <p:nvSpPr>
-          <p:cNvPr id="5" name="Text 3"/>
+                <a:spcPts val="1820"/>
+              </a:lnSpc>
+              <a:spcBef>
+                <a:spcPts val="300"/>
+              </a:spcBef>
+              <a:spcAft>
+                <a:spcPts val="300"/>
+              </a:spcAft>
+              <a:buNone/>
+            </a:pPr>
+            <a:r>
+              <a:rPr lang="en-US" sz="1300" dirty="0">
+                <a:solidFill>
+                  <a:srgbClr val="1A1A1A"/>
+                </a:solidFill>
+                <a:latin typeface="Times New Roman" pitchFamily="34" charset="0"/>
+                <a:ea typeface="Times New Roman" pitchFamily="34" charset="-122"/>
+                <a:cs typeface="Times New Roman" pitchFamily="34" charset="-120"/>
+              </a:rPr>
+              <a:t>In base </a:t>
+            </a:r>
+            <a:pPr algn="l" indent="0" marL="0">
+              <a:lnSpc>
+                <a:spcPts val="1820"/>
+              </a:lnSpc>
+              <a:spcBef>
+                <a:spcPts val="300"/>
+              </a:spcBef>
+              <a:spcAft>
+                <a:spcPts val="300"/>
+              </a:spcAft>
+              <a:buNone/>
+            </a:pPr>
+            <a:r>
+              <a:rPr lang="en-US" sz="1300" i="1" dirty="0">
+                <a:solidFill>
+                  <a:srgbClr val="1A1A1A"/>
+                </a:solidFill>
+                <a:latin typeface="Times New Roman" pitchFamily="34" charset="0"/>
+                <a:ea typeface="Times New Roman" pitchFamily="34" charset="-122"/>
+                <a:cs typeface="Times New Roman" pitchFamily="34" charset="-120"/>
+              </a:rPr>
+              <a:t>n</a:t>
+            </a:r>
+            <a:pPr algn="l" indent="0" marL="0">
+              <a:lnSpc>
+                <a:spcPts val="1820"/>
+              </a:lnSpc>
+              <a:spcBef>
+                <a:spcPts val="300"/>
+              </a:spcBef>
+              <a:spcAft>
+                <a:spcPts val="300"/>
+              </a:spcAft>
+              <a:buNone/>
+            </a:pPr>
+            <a:r>
+              <a:rPr lang="en-US" sz="1300" dirty="0">
+                <a:solidFill>
+                  <a:srgbClr val="1A1A1A"/>
+                </a:solidFill>
+                <a:latin typeface="Times New Roman" pitchFamily="34" charset="0"/>
+                <a:ea typeface="Times New Roman" pitchFamily="34" charset="-122"/>
+                <a:cs typeface="Times New Roman" pitchFamily="34" charset="-120"/>
+              </a:rPr>
+              <a:t>, mark a dot every time the running total reaches or exceeds </a:t>
+            </a:r>
+            <a:pPr algn="l" indent="0" marL="0">
+              <a:lnSpc>
+                <a:spcPts val="1820"/>
+              </a:lnSpc>
+              <a:spcBef>
+                <a:spcPts val="300"/>
+              </a:spcBef>
+              <a:spcAft>
+                <a:spcPts val="300"/>
+              </a:spcAft>
+              <a:buNone/>
+            </a:pPr>
+            <a:r>
+              <a:rPr lang="en-US" sz="1300" i="1" dirty="0">
+                <a:solidFill>
+                  <a:srgbClr val="1A1A1A"/>
+                </a:solidFill>
+                <a:latin typeface="Times New Roman" pitchFamily="34" charset="0"/>
+                <a:ea typeface="Times New Roman" pitchFamily="34" charset="-122"/>
+                <a:cs typeface="Times New Roman" pitchFamily="34" charset="-120"/>
+              </a:rPr>
+              <a:t>n</a:t>
+            </a:r>
+            <a:pPr algn="l" indent="0" marL="0">
+              <a:lnSpc>
+                <a:spcPts val="1820"/>
+              </a:lnSpc>
+              <a:spcBef>
+                <a:spcPts val="300"/>
+              </a:spcBef>
+              <a:spcAft>
+                <a:spcPts val="300"/>
+              </a:spcAft>
+              <a:buNone/>
+            </a:pPr>
+            <a:r>
+              <a:rPr lang="en-US" sz="1300" dirty="0">
+                <a:solidFill>
+                  <a:srgbClr val="1A1A1A"/>
+                </a:solidFill>
+                <a:latin typeface="Times New Roman" pitchFamily="34" charset="0"/>
+                <a:ea typeface="Times New Roman" pitchFamily="34" charset="-122"/>
+                <a:cs typeface="Times New Roman" pitchFamily="34" charset="-120"/>
+              </a:rPr>
+              <a:t>. Subtract </a:t>
+            </a:r>
+            <a:pPr algn="l" indent="0" marL="0">
+              <a:lnSpc>
+                <a:spcPts val="1820"/>
+              </a:lnSpc>
+              <a:spcBef>
+                <a:spcPts val="300"/>
+              </a:spcBef>
+              <a:spcAft>
+                <a:spcPts val="300"/>
+              </a:spcAft>
+              <a:buNone/>
+            </a:pPr>
+            <a:r>
+              <a:rPr lang="en-US" sz="1300" i="1" dirty="0">
+                <a:solidFill>
+                  <a:srgbClr val="1A1A1A"/>
+                </a:solidFill>
+                <a:latin typeface="Times New Roman" pitchFamily="34" charset="0"/>
+                <a:ea typeface="Times New Roman" pitchFamily="34" charset="-122"/>
+                <a:cs typeface="Times New Roman" pitchFamily="34" charset="-120"/>
+              </a:rPr>
+              <a:t>n</a:t>
+            </a:r>
+            <a:pPr algn="l" indent="0" marL="0">
+              <a:lnSpc>
+                <a:spcPts val="1820"/>
+              </a:lnSpc>
+              <a:spcBef>
+                <a:spcPts val="300"/>
+              </a:spcBef>
+              <a:spcAft>
+                <a:spcPts val="300"/>
+              </a:spcAft>
+              <a:buNone/>
+            </a:pPr>
+            <a:r>
+              <a:rPr lang="en-US" sz="1300" dirty="0">
+                <a:solidFill>
+                  <a:srgbClr val="1A1A1A"/>
+                </a:solidFill>
+                <a:latin typeface="Times New Roman" pitchFamily="34" charset="0"/>
+                <a:ea typeface="Times New Roman" pitchFamily="34" charset="-122"/>
+                <a:cs typeface="Times New Roman" pitchFamily="34" charset="-120"/>
+              </a:rPr>
+              <a:t> from the running total. Final running total = units. Dot count = "carry to next column."</a:t>
+            </a:r>
+            <a:endParaRPr lang="en-US" sz="1300" dirty="0"/>
+          </a:p>
+        </p:txBody>
+      </p:sp>
+      <p:sp>
+        <p:nvSpPr>
+          <p:cNvPr id="9" name="Text 7"/>
           <p:cNvSpPr/>
           <p:nvPr/>
         </p:nvSpPr>
